--- a/ppt/solar-farm-monitoring.pptx
+++ b/ppt/solar-farm-monitoring.pptx
@@ -3095,64 +3095,14 @@
       <p:grpSpPr/>
       <p:sp>
         <p:nvSpPr>
-          <p:cNvPr id="2" name="Title 1"/>
-          <p:cNvSpPr>
-            <a:spLocks noGrp="1"/>
-          </p:cNvSpPr>
-          <p:nvPr>
-            <p:ph type="ctrTitle"/>
-          </p:nvPr>
+          <p:cNvPr id="2" name="Rectangle 1"/>
+          <p:cNvSpPr/>
+          <p:nvPr/>
         </p:nvSpPr>
         <p:spPr>
           <a:xfrm>
-            <a:off x="731520" y="2148840"/>
-            <a:ext cx="10698480" cy="1280160"/>
-          </a:xfrm>
-        </p:spPr>
-        <p:txBody>
-          <a:bodyPr wrap="square" anchor="t"/>
-          <a:lstStyle/>
-          <a:p>
-            <a:pPr algn="l"/>
-            <a:r>
-              <a:rPr b="1" sz="3200">
-                <a:solidFill>
-                  <a:srgbClr val="A9791A"/>
-                </a:solidFill>
-                <a:latin typeface="Franklin Gothic Medium"/>
-              </a:rPr>
-              <a:t>Solar Farm Performance Monitoring</a:t>
-            </a:r>
-          </a:p>
-        </p:txBody>
-      </p:sp>
-      <p:sp>
-        <p:nvSpPr>
-          <p:cNvPr id="3" name="Subtitle 2"/>
-          <p:cNvSpPr>
-            <a:spLocks noGrp="1"/>
-          </p:cNvSpPr>
-          <p:nvPr>
-            <p:ph type="subTitle" idx="1"/>
-          </p:nvPr>
-        </p:nvSpPr>
-        <p:spPr/>
-        <p:txBody>
-          <a:bodyPr/>
-          <a:lstStyle/>
-          <a:p/>
-        </p:txBody>
-      </p:sp>
-      <p:sp>
-        <p:nvSpPr>
-          <p:cNvPr id="4" name="Rectangle 3"/>
-          <p:cNvSpPr/>
-          <p:nvPr/>
-        </p:nvSpPr>
-        <p:spPr>
-          <a:xfrm>
-            <a:off x="758952" y="3310128"/>
-            <a:ext cx="3657600" cy="41148"/>
+            <a:off x="-91440" y="-91440"/>
+            <a:ext cx="12435840" cy="7040880"/>
           </a:xfrm>
           <a:prstGeom prst="rect">
             <a:avLst/>
@@ -3189,14 +3139,102 @@
       </p:sp>
       <p:sp>
         <p:nvSpPr>
+          <p:cNvPr id="3" name="Rectangle 2"/>
+          <p:cNvSpPr/>
+          <p:nvPr/>
+        </p:nvSpPr>
+        <p:spPr>
+          <a:xfrm>
+            <a:off x="457200" y="457200"/>
+            <a:ext cx="11277295" cy="5943600"/>
+          </a:xfrm>
+          <a:prstGeom prst="rect">
+            <a:avLst/>
+          </a:prstGeom>
+          <a:noFill/>
+          <a:ln w="19050">
+            <a:solidFill>
+              <a:srgbClr val="E0D0AE"/>
+            </a:solidFill>
+          </a:ln>
+          <a:effectLst/>
+        </p:spPr>
+        <p:style>
+          <a:lnRef idx="1">
+            <a:schemeClr val="accent1"/>
+          </a:lnRef>
+          <a:fillRef idx="3">
+            <a:schemeClr val="accent1"/>
+          </a:fillRef>
+          <a:effectRef idx="2">
+            <a:schemeClr val="accent1"/>
+          </a:effectRef>
+          <a:fontRef idx="minor">
+            <a:schemeClr val="lt1"/>
+          </a:fontRef>
+        </p:style>
+        <p:txBody>
+          <a:bodyPr rtlCol="0" anchor="ctr"/>
+          <a:lstStyle/>
+          <a:p>
+            <a:pPr algn="ctr"/>
+          </a:p>
+        </p:txBody>
+      </p:sp>
+      <p:sp>
+        <p:nvSpPr>
+          <p:cNvPr id="4" name="Oval 3"/>
+          <p:cNvSpPr/>
+          <p:nvPr/>
+        </p:nvSpPr>
+        <p:spPr>
+          <a:xfrm>
+            <a:off x="5479084" y="1120139"/>
+            <a:ext cx="1234440" cy="1234440"/>
+          </a:xfrm>
+          <a:prstGeom prst="ellipse">
+            <a:avLst/>
+          </a:prstGeom>
+          <a:solidFill>
+            <a:srgbClr val="FFFFFF"/>
+          </a:solidFill>
+          <a:ln>
+            <a:noFill/>
+          </a:ln>
+          <a:effectLst/>
+        </p:spPr>
+        <p:style>
+          <a:lnRef idx="1">
+            <a:schemeClr val="accent1"/>
+          </a:lnRef>
+          <a:fillRef idx="3">
+            <a:schemeClr val="accent1"/>
+          </a:fillRef>
+          <a:effectRef idx="2">
+            <a:schemeClr val="accent1"/>
+          </a:effectRef>
+          <a:fontRef idx="minor">
+            <a:schemeClr val="lt1"/>
+          </a:fontRef>
+        </p:style>
+        <p:txBody>
+          <a:bodyPr rtlCol="0" anchor="ctr"/>
+          <a:lstStyle/>
+          <a:p>
+            <a:pPr algn="ctr"/>
+          </a:p>
+        </p:txBody>
+      </p:sp>
+      <p:sp>
+        <p:nvSpPr>
           <p:cNvPr id="5" name="TextBox 4"/>
           <p:cNvSpPr txBox="1"/>
           <p:nvPr/>
         </p:nvSpPr>
         <p:spPr>
           <a:xfrm>
-            <a:off x="758952" y="3520440"/>
-            <a:ext cx="10515600" cy="2194560"/>
+            <a:off x="5479084" y="1120139"/>
+            <a:ext cx="1234440" cy="1234440"/>
           </a:xfrm>
           <a:prstGeom prst="rect">
             <a:avLst/>
@@ -3204,40 +3242,121 @@
           <a:noFill/>
         </p:spPr>
         <p:txBody>
+          <a:bodyPr wrap="none" anchor="ctr">
+            <a:spAutoFit/>
+          </a:bodyPr>
+          <a:lstStyle/>
+          <a:p>
+            <a:pPr algn="ctr"/>
+            <a:r>
+              <a:rPr sz="4000" b="1">
+                <a:solidFill>
+                  <a:srgbClr val="A9791A"/>
+                </a:solidFill>
+                <a:latin typeface="Franklin Gothic Medium"/>
+              </a:rPr>
+              <a:t>SF</a:t>
+            </a:r>
+          </a:p>
+        </p:txBody>
+      </p:sp>
+      <p:sp>
+        <p:nvSpPr>
+          <p:cNvPr id="6" name="TextBox 5"/>
+          <p:cNvSpPr txBox="1"/>
+          <p:nvPr/>
+        </p:nvSpPr>
+        <p:spPr>
+          <a:xfrm>
+            <a:off x="1188720" y="2880360"/>
+            <a:ext cx="9784080" cy="1463040"/>
+          </a:xfrm>
+          <a:prstGeom prst="rect">
+            <a:avLst/>
+          </a:prstGeom>
+          <a:noFill/>
+        </p:spPr>
+        <p:txBody>
+          <a:bodyPr wrap="square" anchor="ctr">
+            <a:spAutoFit/>
+          </a:bodyPr>
+          <a:lstStyle/>
+          <a:p>
+            <a:pPr algn="ctr"/>
+            <a:r>
+              <a:rPr sz="3400" b="1" i="0">
+                <a:solidFill>
+                  <a:srgbClr val="FFFFFF"/>
+                </a:solidFill>
+                <a:latin typeface="Franklin Gothic Medium"/>
+              </a:rPr>
+              <a:t>Solar Farm Performance Monitoring</a:t>
+            </a:r>
+          </a:p>
+        </p:txBody>
+      </p:sp>
+      <p:sp>
+        <p:nvSpPr>
+          <p:cNvPr id="7" name="TextBox 6"/>
+          <p:cNvSpPr txBox="1"/>
+          <p:nvPr/>
+        </p:nvSpPr>
+        <p:spPr>
+          <a:xfrm>
+            <a:off x="1371600" y="4206240"/>
+            <a:ext cx="9418320" cy="548640"/>
+          </a:xfrm>
+          <a:prstGeom prst="rect">
+            <a:avLst/>
+          </a:prstGeom>
+          <a:noFill/>
+        </p:spPr>
+        <p:txBody>
           <a:bodyPr wrap="square" anchor="t">
             <a:spAutoFit/>
           </a:bodyPr>
           <a:lstStyle/>
           <a:p>
-            <a:pPr algn="l"/>
-            <a:r>
-              <a:rPr sz="1800" b="0">
-                <a:solidFill>
-                  <a:srgbClr val="5C655F"/>
+            <a:pPr algn="ctr"/>
+            <a:r>
+              <a:rPr sz="1700" b="0" i="1">
+                <a:solidFill>
+                  <a:srgbClr val="E6D9BE"/>
                 </a:solidFill>
                 <a:latin typeface="Calibri"/>
               </a:rPr>
               <a:t>An edge-to-cloud pipeline that watches two panel arrays live</a:t>
             </a:r>
           </a:p>
-          <a:p>
-            <a:pPr algn="l"/>
-            <a:r>
-              <a:rPr sz="1600" b="1">
-                <a:solidFill>
-                  <a:srgbClr val="232A26"/>
-                </a:solidFill>
-                <a:latin typeface="Calibri"/>
-              </a:rPr>
-              <a:t/>
-            </a:r>
-          </a:p>
-          <a:p>
-            <a:pPr algn="l"/>
-            <a:r>
-              <a:rPr sz="1300" b="0">
-                <a:solidFill>
-                  <a:srgbClr val="5C655F"/>
+        </p:txBody>
+      </p:sp>
+      <p:sp>
+        <p:nvSpPr>
+          <p:cNvPr id="8" name="TextBox 7"/>
+          <p:cNvSpPr txBox="1"/>
+          <p:nvPr/>
+        </p:nvSpPr>
+        <p:spPr>
+          <a:xfrm>
+            <a:off x="1371600" y="5029200"/>
+            <a:ext cx="9418320" cy="1280160"/>
+          </a:xfrm>
+          <a:prstGeom prst="rect">
+            <a:avLst/>
+          </a:prstGeom>
+          <a:noFill/>
+        </p:spPr>
+        <p:txBody>
+          <a:bodyPr wrap="square" anchor="t">
+            <a:spAutoFit/>
+          </a:bodyPr>
+          <a:lstStyle/>
+          <a:p>
+            <a:pPr algn="ctr"/>
+            <a:r>
+              <a:rPr sz="1250" b="0" i="0">
+                <a:solidFill>
+                  <a:srgbClr val="DCC9A3"/>
                 </a:solidFill>
                 <a:latin typeface="Calibri"/>
               </a:rPr>
@@ -3245,11 +3364,11 @@
             </a:r>
           </a:p>
           <a:p>
-            <a:pPr algn="l"/>
-            <a:r>
-              <a:rPr sz="1300" b="0">
-                <a:solidFill>
-                  <a:srgbClr val="5C655F"/>
+            <a:pPr algn="ctr"/>
+            <a:r>
+              <a:rPr sz="1250" b="0" i="0">
+                <a:solidFill>
+                  <a:srgbClr val="DCC9A3"/>
                 </a:solidFill>
                 <a:latin typeface="Calibri"/>
               </a:rPr>

--- a/ppt/solar-farm-monitoring.pptx
+++ b/ppt/solar-farm-monitoring.pptx
@@ -3183,58 +3183,14 @@
       </p:sp>
       <p:sp>
         <p:nvSpPr>
-          <p:cNvPr id="4" name="Oval 3"/>
-          <p:cNvSpPr/>
+          <p:cNvPr id="4" name="TextBox 3"/>
+          <p:cNvSpPr txBox="1"/>
           <p:nvPr/>
         </p:nvSpPr>
         <p:spPr>
           <a:xfrm>
-            <a:off x="5479084" y="1120139"/>
-            <a:ext cx="1234440" cy="1234440"/>
-          </a:xfrm>
-          <a:prstGeom prst="ellipse">
-            <a:avLst/>
-          </a:prstGeom>
-          <a:solidFill>
-            <a:srgbClr val="FFFFFF"/>
-          </a:solidFill>
-          <a:ln>
-            <a:noFill/>
-          </a:ln>
-          <a:effectLst/>
-        </p:spPr>
-        <p:style>
-          <a:lnRef idx="1">
-            <a:schemeClr val="accent1"/>
-          </a:lnRef>
-          <a:fillRef idx="3">
-            <a:schemeClr val="accent1"/>
-          </a:fillRef>
-          <a:effectRef idx="2">
-            <a:schemeClr val="accent1"/>
-          </a:effectRef>
-          <a:fontRef idx="minor">
-            <a:schemeClr val="lt1"/>
-          </a:fontRef>
-        </p:style>
-        <p:txBody>
-          <a:bodyPr rtlCol="0" anchor="ctr"/>
-          <a:lstStyle/>
-          <a:p>
-            <a:pPr algn="ctr"/>
-          </a:p>
-        </p:txBody>
-      </p:sp>
-      <p:sp>
-        <p:nvSpPr>
-          <p:cNvPr id="5" name="TextBox 4"/>
-          <p:cNvSpPr txBox="1"/>
-          <p:nvPr/>
-        </p:nvSpPr>
-        <p:spPr>
-          <a:xfrm>
-            <a:off x="5479084" y="1120139"/>
-            <a:ext cx="1234440" cy="1234440"/>
+            <a:off x="1188720" y="2103120"/>
+            <a:ext cx="9784080" cy="1783080"/>
           </a:xfrm>
           <a:prstGeom prst="rect">
             <a:avLst/>
@@ -3242,41 +3198,6 @@
           <a:noFill/>
         </p:spPr>
         <p:txBody>
-          <a:bodyPr wrap="none" anchor="ctr">
-            <a:spAutoFit/>
-          </a:bodyPr>
-          <a:lstStyle/>
-          <a:p>
-            <a:pPr algn="ctr"/>
-            <a:r>
-              <a:rPr sz="4000" b="1">
-                <a:solidFill>
-                  <a:srgbClr val="A9791A"/>
-                </a:solidFill>
-                <a:latin typeface="Franklin Gothic Medium"/>
-              </a:rPr>
-              <a:t>SF</a:t>
-            </a:r>
-          </a:p>
-        </p:txBody>
-      </p:sp>
-      <p:sp>
-        <p:nvSpPr>
-          <p:cNvPr id="6" name="TextBox 5"/>
-          <p:cNvSpPr txBox="1"/>
-          <p:nvPr/>
-        </p:nvSpPr>
-        <p:spPr>
-          <a:xfrm>
-            <a:off x="1188720" y="2880360"/>
-            <a:ext cx="9784080" cy="1463040"/>
-          </a:xfrm>
-          <a:prstGeom prst="rect">
-            <a:avLst/>
-          </a:prstGeom>
-          <a:noFill/>
-        </p:spPr>
-        <p:txBody>
           <a:bodyPr wrap="square" anchor="ctr">
             <a:spAutoFit/>
           </a:bodyPr>
@@ -3297,13 +3218,13 @@
       </p:sp>
       <p:sp>
         <p:nvSpPr>
-          <p:cNvPr id="7" name="TextBox 6"/>
+          <p:cNvPr id="5" name="TextBox 4"/>
           <p:cNvSpPr txBox="1"/>
           <p:nvPr/>
         </p:nvSpPr>
         <p:spPr>
           <a:xfrm>
-            <a:off x="1371600" y="4206240"/>
+            <a:off x="1371600" y="3931920"/>
             <a:ext cx="9418320" cy="548640"/>
           </a:xfrm>
           <a:prstGeom prst="rect">
@@ -3332,13 +3253,13 @@
       </p:sp>
       <p:sp>
         <p:nvSpPr>
-          <p:cNvPr id="8" name="TextBox 7"/>
+          <p:cNvPr id="6" name="TextBox 5"/>
           <p:cNvSpPr txBox="1"/>
           <p:nvPr/>
         </p:nvSpPr>
         <p:spPr>
           <a:xfrm>
-            <a:off x="1371600" y="5029200"/>
+            <a:off x="1371600" y="4800600"/>
             <a:ext cx="9418320" cy="1280160"/>
           </a:xfrm>
           <a:prstGeom prst="rect">

--- a/ppt/solar-farm-monitoring.pptx
+++ b/ppt/solar-farm-monitoring.pptx
@@ -3318,6 +3318,94 @@
       <p:grpSpPr/>
       <p:sp>
         <p:nvSpPr>
+          <p:cNvPr id="5" name="Rectangle 4"/>
+          <p:cNvSpPr/>
+          <p:nvPr/>
+        </p:nvSpPr>
+        <p:spPr>
+          <a:xfrm>
+            <a:off x="0" y="0"/>
+            <a:ext cx="502920" cy="6858000"/>
+          </a:xfrm>
+          <a:prstGeom prst="rect">
+            <a:avLst/>
+          </a:prstGeom>
+          <a:solidFill>
+            <a:srgbClr val="A9791A"/>
+          </a:solidFill>
+          <a:ln>
+            <a:noFill/>
+          </a:ln>
+          <a:effectLst/>
+        </p:spPr>
+        <p:style>
+          <a:lnRef idx="1">
+            <a:schemeClr val="accent1"/>
+          </a:lnRef>
+          <a:fillRef idx="3">
+            <a:schemeClr val="accent1"/>
+          </a:fillRef>
+          <a:effectRef idx="2">
+            <a:schemeClr val="accent1"/>
+          </a:effectRef>
+          <a:fontRef idx="minor">
+            <a:schemeClr val="lt1"/>
+          </a:fontRef>
+        </p:style>
+        <p:txBody>
+          <a:bodyPr rtlCol="0" anchor="ctr"/>
+          <a:lstStyle/>
+          <a:p>
+            <a:pPr algn="ctr"/>
+          </a:p>
+        </p:txBody>
+      </p:sp>
+      <p:sp>
+        <p:nvSpPr>
+          <p:cNvPr id="4" name="Rectangle 3"/>
+          <p:cNvSpPr/>
+          <p:nvPr/>
+        </p:nvSpPr>
+        <p:spPr>
+          <a:xfrm>
+            <a:off x="-45720" y="-45720"/>
+            <a:ext cx="12344400" cy="6949440"/>
+          </a:xfrm>
+          <a:prstGeom prst="rect">
+            <a:avLst/>
+          </a:prstGeom>
+          <a:solidFill>
+            <a:srgbClr val="F6F1E8"/>
+          </a:solidFill>
+          <a:ln>
+            <a:noFill/>
+          </a:ln>
+          <a:effectLst/>
+        </p:spPr>
+        <p:style>
+          <a:lnRef idx="1">
+            <a:schemeClr val="accent1"/>
+          </a:lnRef>
+          <a:fillRef idx="3">
+            <a:schemeClr val="accent1"/>
+          </a:fillRef>
+          <a:effectRef idx="2">
+            <a:schemeClr val="accent1"/>
+          </a:effectRef>
+          <a:fontRef idx="minor">
+            <a:schemeClr val="lt1"/>
+          </a:fontRef>
+        </p:style>
+        <p:txBody>
+          <a:bodyPr rtlCol="0" anchor="ctr"/>
+          <a:lstStyle/>
+          <a:p>
+            <a:pPr algn="ctr"/>
+          </a:p>
+        </p:txBody>
+      </p:sp>
+      <p:sp>
+        <p:nvSpPr>
           <p:cNvPr id="2" name="Title 1"/>
           <p:cNvSpPr>
             <a:spLocks noGrp="1"/>
@@ -3328,8 +3416,8 @@
         </p:nvSpPr>
         <p:spPr>
           <a:xfrm>
-            <a:off x="640080" y="384048"/>
-            <a:ext cx="10972800" cy="868680"/>
+            <a:off x="868680" y="384048"/>
+            <a:ext cx="10789920" cy="868680"/>
           </a:xfrm>
         </p:spPr>
         <p:txBody>
@@ -3361,8 +3449,8 @@
         </p:nvSpPr>
         <p:spPr>
           <a:xfrm>
-            <a:off x="658368" y="1481328"/>
-            <a:ext cx="10972800" cy="4846320"/>
+            <a:off x="886968" y="1481328"/>
+            <a:ext cx="10789920" cy="4846320"/>
           </a:xfrm>
         </p:spPr>
         <p:txBody>
@@ -3454,13 +3542,13 @@
       </p:sp>
       <p:sp>
         <p:nvSpPr>
-          <p:cNvPr id="4" name="Rectangle 3"/>
+          <p:cNvPr id="6" name="Rectangle 5"/>
           <p:cNvSpPr/>
           <p:nvPr/>
         </p:nvSpPr>
         <p:spPr>
           <a:xfrm>
-            <a:off x="658368" y="1261872"/>
+            <a:off x="886968" y="1261872"/>
             <a:ext cx="3108960" cy="36576"/>
           </a:xfrm>
           <a:prstGeom prst="rect">
@@ -3516,6 +3604,94 @@
       <p:grpSpPr/>
       <p:sp>
         <p:nvSpPr>
+          <p:cNvPr id="5" name="Rectangle 4"/>
+          <p:cNvSpPr/>
+          <p:nvPr/>
+        </p:nvSpPr>
+        <p:spPr>
+          <a:xfrm>
+            <a:off x="0" y="0"/>
+            <a:ext cx="502920" cy="6858000"/>
+          </a:xfrm>
+          <a:prstGeom prst="rect">
+            <a:avLst/>
+          </a:prstGeom>
+          <a:solidFill>
+            <a:srgbClr val="A9791A"/>
+          </a:solidFill>
+          <a:ln>
+            <a:noFill/>
+          </a:ln>
+          <a:effectLst/>
+        </p:spPr>
+        <p:style>
+          <a:lnRef idx="1">
+            <a:schemeClr val="accent1"/>
+          </a:lnRef>
+          <a:fillRef idx="3">
+            <a:schemeClr val="accent1"/>
+          </a:fillRef>
+          <a:effectRef idx="2">
+            <a:schemeClr val="accent1"/>
+          </a:effectRef>
+          <a:fontRef idx="minor">
+            <a:schemeClr val="lt1"/>
+          </a:fontRef>
+        </p:style>
+        <p:txBody>
+          <a:bodyPr rtlCol="0" anchor="ctr"/>
+          <a:lstStyle/>
+          <a:p>
+            <a:pPr algn="ctr"/>
+          </a:p>
+        </p:txBody>
+      </p:sp>
+      <p:sp>
+        <p:nvSpPr>
+          <p:cNvPr id="4" name="Rectangle 3"/>
+          <p:cNvSpPr/>
+          <p:nvPr/>
+        </p:nvSpPr>
+        <p:spPr>
+          <a:xfrm>
+            <a:off x="-45720" y="-45720"/>
+            <a:ext cx="12344400" cy="6949440"/>
+          </a:xfrm>
+          <a:prstGeom prst="rect">
+            <a:avLst/>
+          </a:prstGeom>
+          <a:solidFill>
+            <a:srgbClr val="F6F1E8"/>
+          </a:solidFill>
+          <a:ln>
+            <a:noFill/>
+          </a:ln>
+          <a:effectLst/>
+        </p:spPr>
+        <p:style>
+          <a:lnRef idx="1">
+            <a:schemeClr val="accent1"/>
+          </a:lnRef>
+          <a:fillRef idx="3">
+            <a:schemeClr val="accent1"/>
+          </a:fillRef>
+          <a:effectRef idx="2">
+            <a:schemeClr val="accent1"/>
+          </a:effectRef>
+          <a:fontRef idx="minor">
+            <a:schemeClr val="lt1"/>
+          </a:fontRef>
+        </p:style>
+        <p:txBody>
+          <a:bodyPr rtlCol="0" anchor="ctr"/>
+          <a:lstStyle/>
+          <a:p>
+            <a:pPr algn="ctr"/>
+          </a:p>
+        </p:txBody>
+      </p:sp>
+      <p:sp>
+        <p:nvSpPr>
           <p:cNvPr id="2" name="Title 1"/>
           <p:cNvSpPr>
             <a:spLocks noGrp="1"/>
@@ -3526,8 +3702,8 @@
         </p:nvSpPr>
         <p:spPr>
           <a:xfrm>
-            <a:off x="640080" y="384048"/>
-            <a:ext cx="10972800" cy="868680"/>
+            <a:off x="868680" y="384048"/>
+            <a:ext cx="10789920" cy="868680"/>
           </a:xfrm>
         </p:spPr>
         <p:txBody>
@@ -3559,8 +3735,8 @@
         </p:nvSpPr>
         <p:spPr>
           <a:xfrm>
-            <a:off x="658368" y="1481328"/>
-            <a:ext cx="10972800" cy="4846320"/>
+            <a:off x="886968" y="1481328"/>
+            <a:ext cx="10789920" cy="4846320"/>
           </a:xfrm>
         </p:spPr>
         <p:txBody>
@@ -3684,13 +3860,13 @@
       </p:sp>
       <p:sp>
         <p:nvSpPr>
-          <p:cNvPr id="4" name="Rectangle 3"/>
+          <p:cNvPr id="6" name="Rectangle 5"/>
           <p:cNvSpPr/>
           <p:nvPr/>
         </p:nvSpPr>
         <p:spPr>
           <a:xfrm>
-            <a:off x="658368" y="1261872"/>
+            <a:off x="886968" y="1261872"/>
             <a:ext cx="3108960" cy="36576"/>
           </a:xfrm>
           <a:prstGeom prst="rect">
@@ -3746,150 +3922,14 @@
       <p:grpSpPr/>
       <p:sp>
         <p:nvSpPr>
-          <p:cNvPr id="2" name="Title 1"/>
-          <p:cNvSpPr>
-            <a:spLocks noGrp="1"/>
-          </p:cNvSpPr>
-          <p:nvPr>
-            <p:ph type="title"/>
-          </p:nvPr>
-        </p:nvSpPr>
-        <p:spPr>
-          <a:xfrm>
-            <a:off x="640080" y="384048"/>
-            <a:ext cx="10972800" cy="868680"/>
-          </a:xfrm>
-        </p:spPr>
-        <p:txBody>
-          <a:bodyPr wrap="square" anchor="t"/>
-          <a:lstStyle/>
-          <a:p>
-            <a:pPr algn="l"/>
-            <a:r>
-              <a:rPr b="1" sz="2700">
-                <a:solidFill>
-                  <a:srgbClr val="A9791A"/>
-                </a:solidFill>
-                <a:latin typeface="Franklin Gothic Medium"/>
-              </a:rPr>
-              <a:t>Demonstration highlights</a:t>
-            </a:r>
-          </a:p>
-        </p:txBody>
-      </p:sp>
-      <p:sp>
-        <p:nvSpPr>
-          <p:cNvPr id="3" name="Content Placeholder 2"/>
-          <p:cNvSpPr>
-            <a:spLocks noGrp="1"/>
-          </p:cNvSpPr>
-          <p:nvPr>
-            <p:ph idx="1"/>
-          </p:nvPr>
-        </p:nvSpPr>
-        <p:spPr>
-          <a:xfrm>
-            <a:off x="658368" y="1481328"/>
-            <a:ext cx="5760720" cy="4754880"/>
-          </a:xfrm>
-        </p:spPr>
-        <p:txBody>
-          <a:bodyPr wrap="square">
-            <a:normAutofit/>
-          </a:bodyPr>
-          <a:lstStyle/>
-          <a:p>
-            <a:pPr>
-              <a:spcAft>
-                <a:spcPts val="800"/>
-              </a:spcAft>
-            </a:pPr>
-            <a:r>
-              <a:rPr sz="1500" b="0">
-                <a:solidFill>
-                  <a:srgbClr val="232A26"/>
-                </a:solidFill>
-                <a:latin typeface="Calibri"/>
-              </a:rPr>
-              <a:t>Dashboard during a local end-to-end run: all four pipeline health checks up, the live efficiency heatmap and per-array readings.</a:t>
-            </a:r>
-          </a:p>
-          <a:p>
-            <a:pPr>
-              <a:spcAft>
-                <a:spcPts val="800"/>
-              </a:spcAft>
-            </a:pPr>
-            <a:r>
-              <a:rPr sz="1500" b="0">
-                <a:solidFill>
-                  <a:srgbClr val="232A26"/>
-                </a:solidFill>
-                <a:latin typeface="Calibri"/>
-              </a:rPr>
-              <a:t>Threshold alerts cover thermal derate risk, inverter underperformance, undervoltage and cleaning required.</a:t>
-            </a:r>
-          </a:p>
-          <a:p>
-            <a:pPr>
-              <a:spcAft>
-                <a:spcPts val="800"/>
-              </a:spcAft>
-            </a:pPr>
-            <a:r>
-              <a:rPr sz="1500" b="1">
-                <a:solidFill>
-                  <a:srgbClr val="A9791A"/>
-                </a:solidFill>
-                <a:latin typeface="Calibri"/>
-              </a:rPr>
-              <a:t>110 automated tests pass across sensors, fog node, backend and dashboard.</a:t>
-            </a:r>
-          </a:p>
-          <a:p>
-            <a:pPr>
-              <a:spcAft>
-                <a:spcPts val="800"/>
-              </a:spcAft>
-            </a:pPr>
-            <a:r>
-              <a:rPr sz="1500" b="0">
-                <a:solidFill>
-                  <a:srgbClr val="232A26"/>
-                </a:solidFill>
-                <a:latin typeface="Calibri"/>
-              </a:rPr>
-              <a:t>4 of 4 pipeline health checks green: gateway, queue, processor and pipeline.</a:t>
-            </a:r>
-          </a:p>
-          <a:p>
-            <a:pPr>
-              <a:spcAft>
-                <a:spcPts val="800"/>
-              </a:spcAft>
-            </a:pPr>
-            <a:r>
-              <a:rPr sz="1500" b="0">
-                <a:solidFill>
-                  <a:srgbClr val="232A26"/>
-                </a:solidFill>
-                <a:latin typeface="Calibri"/>
-              </a:rPr>
-              <a:t>A 2,000-message burst was pushed through the queue by 32 parallel senders in the load test.</a:t>
-            </a:r>
-          </a:p>
-        </p:txBody>
-      </p:sp>
-      <p:sp>
-        <p:nvSpPr>
-          <p:cNvPr id="4" name="Rectangle 3"/>
+          <p:cNvPr id="5" name="Rectangle 4"/>
           <p:cNvSpPr/>
           <p:nvPr/>
         </p:nvSpPr>
         <p:spPr>
           <a:xfrm>
-            <a:off x="658368" y="1261872"/>
-            <a:ext cx="3108960" cy="36576"/>
+            <a:off x="0" y="0"/>
+            <a:ext cx="502920" cy="6858000"/>
           </a:xfrm>
           <a:prstGeom prst="rect">
             <a:avLst/>
@@ -3924,9 +3964,233 @@
           </a:p>
         </p:txBody>
       </p:sp>
+      <p:sp>
+        <p:nvSpPr>
+          <p:cNvPr id="4" name="Rectangle 3"/>
+          <p:cNvSpPr/>
+          <p:nvPr/>
+        </p:nvSpPr>
+        <p:spPr>
+          <a:xfrm>
+            <a:off x="-45720" y="-45720"/>
+            <a:ext cx="12344400" cy="6949440"/>
+          </a:xfrm>
+          <a:prstGeom prst="rect">
+            <a:avLst/>
+          </a:prstGeom>
+          <a:solidFill>
+            <a:srgbClr val="F6F1E8"/>
+          </a:solidFill>
+          <a:ln>
+            <a:noFill/>
+          </a:ln>
+          <a:effectLst/>
+        </p:spPr>
+        <p:style>
+          <a:lnRef idx="1">
+            <a:schemeClr val="accent1"/>
+          </a:lnRef>
+          <a:fillRef idx="3">
+            <a:schemeClr val="accent1"/>
+          </a:fillRef>
+          <a:effectRef idx="2">
+            <a:schemeClr val="accent1"/>
+          </a:effectRef>
+          <a:fontRef idx="minor">
+            <a:schemeClr val="lt1"/>
+          </a:fontRef>
+        </p:style>
+        <p:txBody>
+          <a:bodyPr rtlCol="0" anchor="ctr"/>
+          <a:lstStyle/>
+          <a:p>
+            <a:pPr algn="ctr"/>
+          </a:p>
+        </p:txBody>
+      </p:sp>
+      <p:sp>
+        <p:nvSpPr>
+          <p:cNvPr id="2" name="Title 1"/>
+          <p:cNvSpPr>
+            <a:spLocks noGrp="1"/>
+          </p:cNvSpPr>
+          <p:nvPr>
+            <p:ph type="title"/>
+          </p:nvPr>
+        </p:nvSpPr>
+        <p:spPr>
+          <a:xfrm>
+            <a:off x="868680" y="384048"/>
+            <a:ext cx="10789920" cy="868680"/>
+          </a:xfrm>
+        </p:spPr>
+        <p:txBody>
+          <a:bodyPr wrap="square" anchor="t"/>
+          <a:lstStyle/>
+          <a:p>
+            <a:pPr algn="l"/>
+            <a:r>
+              <a:rPr b="1" sz="2700">
+                <a:solidFill>
+                  <a:srgbClr val="A9791A"/>
+                </a:solidFill>
+                <a:latin typeface="Franklin Gothic Medium"/>
+              </a:rPr>
+              <a:t>Demonstration highlights</a:t>
+            </a:r>
+          </a:p>
+        </p:txBody>
+      </p:sp>
+      <p:sp>
+        <p:nvSpPr>
+          <p:cNvPr id="3" name="Content Placeholder 2"/>
+          <p:cNvSpPr>
+            <a:spLocks noGrp="1"/>
+          </p:cNvSpPr>
+          <p:nvPr>
+            <p:ph idx="1"/>
+          </p:nvPr>
+        </p:nvSpPr>
+        <p:spPr>
+          <a:xfrm>
+            <a:off x="886968" y="1481328"/>
+            <a:ext cx="5577840" cy="4754880"/>
+          </a:xfrm>
+        </p:spPr>
+        <p:txBody>
+          <a:bodyPr wrap="square">
+            <a:normAutofit/>
+          </a:bodyPr>
+          <a:lstStyle/>
+          <a:p>
+            <a:pPr>
+              <a:spcAft>
+                <a:spcPts val="800"/>
+              </a:spcAft>
+            </a:pPr>
+            <a:r>
+              <a:rPr sz="1500" b="0">
+                <a:solidFill>
+                  <a:srgbClr val="232A26"/>
+                </a:solidFill>
+                <a:latin typeface="Calibri"/>
+              </a:rPr>
+              <a:t>Dashboard during a local end-to-end run: all four pipeline health checks up, the live efficiency heatmap and per-array readings.</a:t>
+            </a:r>
+          </a:p>
+          <a:p>
+            <a:pPr>
+              <a:spcAft>
+                <a:spcPts val="800"/>
+              </a:spcAft>
+            </a:pPr>
+            <a:r>
+              <a:rPr sz="1500" b="0">
+                <a:solidFill>
+                  <a:srgbClr val="232A26"/>
+                </a:solidFill>
+                <a:latin typeface="Calibri"/>
+              </a:rPr>
+              <a:t>Threshold alerts cover thermal derate risk, inverter underperformance, undervoltage and cleaning required.</a:t>
+            </a:r>
+          </a:p>
+          <a:p>
+            <a:pPr>
+              <a:spcAft>
+                <a:spcPts val="800"/>
+              </a:spcAft>
+            </a:pPr>
+            <a:r>
+              <a:rPr sz="1500" b="1">
+                <a:solidFill>
+                  <a:srgbClr val="A9791A"/>
+                </a:solidFill>
+                <a:latin typeface="Calibri"/>
+              </a:rPr>
+              <a:t>110 automated tests pass across sensors, fog node, backend and dashboard.</a:t>
+            </a:r>
+          </a:p>
+          <a:p>
+            <a:pPr>
+              <a:spcAft>
+                <a:spcPts val="800"/>
+              </a:spcAft>
+            </a:pPr>
+            <a:r>
+              <a:rPr sz="1500" b="0">
+                <a:solidFill>
+                  <a:srgbClr val="232A26"/>
+                </a:solidFill>
+                <a:latin typeface="Calibri"/>
+              </a:rPr>
+              <a:t>4 of 4 pipeline health checks green: gateway, queue, processor and pipeline.</a:t>
+            </a:r>
+          </a:p>
+          <a:p>
+            <a:pPr>
+              <a:spcAft>
+                <a:spcPts val="800"/>
+              </a:spcAft>
+            </a:pPr>
+            <a:r>
+              <a:rPr sz="1500" b="0">
+                <a:solidFill>
+                  <a:srgbClr val="232A26"/>
+                </a:solidFill>
+                <a:latin typeface="Calibri"/>
+              </a:rPr>
+              <a:t>A 2,000-message burst was pushed through the queue by 32 parallel senders in the load test.</a:t>
+            </a:r>
+          </a:p>
+        </p:txBody>
+      </p:sp>
+      <p:sp>
+        <p:nvSpPr>
+          <p:cNvPr id="6" name="Rectangle 5"/>
+          <p:cNvSpPr/>
+          <p:nvPr/>
+        </p:nvSpPr>
+        <p:spPr>
+          <a:xfrm>
+            <a:off x="886968" y="1261872"/>
+            <a:ext cx="3108960" cy="36576"/>
+          </a:xfrm>
+          <a:prstGeom prst="rect">
+            <a:avLst/>
+          </a:prstGeom>
+          <a:solidFill>
+            <a:srgbClr val="A9791A"/>
+          </a:solidFill>
+          <a:ln>
+            <a:noFill/>
+          </a:ln>
+          <a:effectLst/>
+        </p:spPr>
+        <p:style>
+          <a:lnRef idx="1">
+            <a:schemeClr val="accent1"/>
+          </a:lnRef>
+          <a:fillRef idx="3">
+            <a:schemeClr val="accent1"/>
+          </a:fillRef>
+          <a:effectRef idx="2">
+            <a:schemeClr val="accent1"/>
+          </a:effectRef>
+          <a:fontRef idx="minor">
+            <a:schemeClr val="lt1"/>
+          </a:fontRef>
+        </p:style>
+        <p:txBody>
+          <a:bodyPr rtlCol="0" anchor="ctr"/>
+          <a:lstStyle/>
+          <a:p>
+            <a:pPr algn="ctr"/>
+          </a:p>
+        </p:txBody>
+      </p:sp>
       <p:pic>
         <p:nvPicPr>
-          <p:cNvPr id="5" name="Picture 4" descr="dashboard-desktop.png"/>
+          <p:cNvPr id="7" name="Picture 6" descr="dashboard-desktop.png"/>
           <p:cNvPicPr>
             <a:picLocks noChangeAspect="1"/>
           </p:cNvPicPr>
@@ -3940,7 +4204,7 @@
         </p:blipFill>
         <p:spPr>
           <a:xfrm>
-            <a:off x="7282236" y="1517904"/>
+            <a:off x="7327956" y="1517904"/>
             <a:ext cx="3814967" cy="4572000"/>
           </a:xfrm>
           <a:prstGeom prst="rect">
@@ -3968,6 +4232,94 @@
       <p:grpSpPr/>
       <p:sp>
         <p:nvSpPr>
+          <p:cNvPr id="5" name="Rectangle 4"/>
+          <p:cNvSpPr/>
+          <p:nvPr/>
+        </p:nvSpPr>
+        <p:spPr>
+          <a:xfrm>
+            <a:off x="0" y="0"/>
+            <a:ext cx="502920" cy="6858000"/>
+          </a:xfrm>
+          <a:prstGeom prst="rect">
+            <a:avLst/>
+          </a:prstGeom>
+          <a:solidFill>
+            <a:srgbClr val="A9791A"/>
+          </a:solidFill>
+          <a:ln>
+            <a:noFill/>
+          </a:ln>
+          <a:effectLst/>
+        </p:spPr>
+        <p:style>
+          <a:lnRef idx="1">
+            <a:schemeClr val="accent1"/>
+          </a:lnRef>
+          <a:fillRef idx="3">
+            <a:schemeClr val="accent1"/>
+          </a:fillRef>
+          <a:effectRef idx="2">
+            <a:schemeClr val="accent1"/>
+          </a:effectRef>
+          <a:fontRef idx="minor">
+            <a:schemeClr val="lt1"/>
+          </a:fontRef>
+        </p:style>
+        <p:txBody>
+          <a:bodyPr rtlCol="0" anchor="ctr"/>
+          <a:lstStyle/>
+          <a:p>
+            <a:pPr algn="ctr"/>
+          </a:p>
+        </p:txBody>
+      </p:sp>
+      <p:sp>
+        <p:nvSpPr>
+          <p:cNvPr id="4" name="Rectangle 3"/>
+          <p:cNvSpPr/>
+          <p:nvPr/>
+        </p:nvSpPr>
+        <p:spPr>
+          <a:xfrm>
+            <a:off x="-45720" y="-45720"/>
+            <a:ext cx="12344400" cy="6949440"/>
+          </a:xfrm>
+          <a:prstGeom prst="rect">
+            <a:avLst/>
+          </a:prstGeom>
+          <a:solidFill>
+            <a:srgbClr val="F6F1E8"/>
+          </a:solidFill>
+          <a:ln>
+            <a:noFill/>
+          </a:ln>
+          <a:effectLst/>
+        </p:spPr>
+        <p:style>
+          <a:lnRef idx="1">
+            <a:schemeClr val="accent1"/>
+          </a:lnRef>
+          <a:fillRef idx="3">
+            <a:schemeClr val="accent1"/>
+          </a:fillRef>
+          <a:effectRef idx="2">
+            <a:schemeClr val="accent1"/>
+          </a:effectRef>
+          <a:fontRef idx="minor">
+            <a:schemeClr val="lt1"/>
+          </a:fontRef>
+        </p:style>
+        <p:txBody>
+          <a:bodyPr rtlCol="0" anchor="ctr"/>
+          <a:lstStyle/>
+          <a:p>
+            <a:pPr algn="ctr"/>
+          </a:p>
+        </p:txBody>
+      </p:sp>
+      <p:sp>
+        <p:nvSpPr>
           <p:cNvPr id="2" name="Title 1"/>
           <p:cNvSpPr>
             <a:spLocks noGrp="1"/>
@@ -3978,8 +4330,8 @@
         </p:nvSpPr>
         <p:spPr>
           <a:xfrm>
-            <a:off x="640080" y="384048"/>
-            <a:ext cx="10972800" cy="868680"/>
+            <a:off x="868680" y="384048"/>
+            <a:ext cx="10789920" cy="868680"/>
           </a:xfrm>
         </p:spPr>
         <p:txBody>
@@ -4011,8 +4363,8 @@
         </p:nvSpPr>
         <p:spPr>
           <a:xfrm>
-            <a:off x="658368" y="1481328"/>
-            <a:ext cx="10972800" cy="4846320"/>
+            <a:off x="886968" y="1481328"/>
+            <a:ext cx="10789920" cy="4846320"/>
           </a:xfrm>
         </p:spPr>
         <p:txBody>
@@ -4152,13 +4504,13 @@
       </p:sp>
       <p:sp>
         <p:nvSpPr>
-          <p:cNvPr id="4" name="Rectangle 3"/>
+          <p:cNvPr id="6" name="Rectangle 5"/>
           <p:cNvSpPr/>
           <p:nvPr/>
         </p:nvSpPr>
         <p:spPr>
           <a:xfrm>
-            <a:off x="658368" y="1261872"/>
+            <a:off x="886968" y="1261872"/>
             <a:ext cx="3108960" cy="36576"/>
           </a:xfrm>
           <a:prstGeom prst="rect">
@@ -4214,6 +4566,94 @@
       <p:grpSpPr/>
       <p:sp>
         <p:nvSpPr>
+          <p:cNvPr id="5" name="Rectangle 4"/>
+          <p:cNvSpPr/>
+          <p:nvPr/>
+        </p:nvSpPr>
+        <p:spPr>
+          <a:xfrm>
+            <a:off x="0" y="0"/>
+            <a:ext cx="502920" cy="6858000"/>
+          </a:xfrm>
+          <a:prstGeom prst="rect">
+            <a:avLst/>
+          </a:prstGeom>
+          <a:solidFill>
+            <a:srgbClr val="A9791A"/>
+          </a:solidFill>
+          <a:ln>
+            <a:noFill/>
+          </a:ln>
+          <a:effectLst/>
+        </p:spPr>
+        <p:style>
+          <a:lnRef idx="1">
+            <a:schemeClr val="accent1"/>
+          </a:lnRef>
+          <a:fillRef idx="3">
+            <a:schemeClr val="accent1"/>
+          </a:fillRef>
+          <a:effectRef idx="2">
+            <a:schemeClr val="accent1"/>
+          </a:effectRef>
+          <a:fontRef idx="minor">
+            <a:schemeClr val="lt1"/>
+          </a:fontRef>
+        </p:style>
+        <p:txBody>
+          <a:bodyPr rtlCol="0" anchor="ctr"/>
+          <a:lstStyle/>
+          <a:p>
+            <a:pPr algn="ctr"/>
+          </a:p>
+        </p:txBody>
+      </p:sp>
+      <p:sp>
+        <p:nvSpPr>
+          <p:cNvPr id="4" name="Rectangle 3"/>
+          <p:cNvSpPr/>
+          <p:nvPr/>
+        </p:nvSpPr>
+        <p:spPr>
+          <a:xfrm>
+            <a:off x="-45720" y="-45720"/>
+            <a:ext cx="12344400" cy="6949440"/>
+          </a:xfrm>
+          <a:prstGeom prst="rect">
+            <a:avLst/>
+          </a:prstGeom>
+          <a:solidFill>
+            <a:srgbClr val="F6F1E8"/>
+          </a:solidFill>
+          <a:ln>
+            <a:noFill/>
+          </a:ln>
+          <a:effectLst/>
+        </p:spPr>
+        <p:style>
+          <a:lnRef idx="1">
+            <a:schemeClr val="accent1"/>
+          </a:lnRef>
+          <a:fillRef idx="3">
+            <a:schemeClr val="accent1"/>
+          </a:fillRef>
+          <a:effectRef idx="2">
+            <a:schemeClr val="accent1"/>
+          </a:effectRef>
+          <a:fontRef idx="minor">
+            <a:schemeClr val="lt1"/>
+          </a:fontRef>
+        </p:style>
+        <p:txBody>
+          <a:bodyPr rtlCol="0" anchor="ctr"/>
+          <a:lstStyle/>
+          <a:p>
+            <a:pPr algn="ctr"/>
+          </a:p>
+        </p:txBody>
+      </p:sp>
+      <p:sp>
+        <p:nvSpPr>
           <p:cNvPr id="2" name="Title 1"/>
           <p:cNvSpPr>
             <a:spLocks noGrp="1"/>
@@ -4224,8 +4664,8 @@
         </p:nvSpPr>
         <p:spPr>
           <a:xfrm>
-            <a:off x="640080" y="384048"/>
-            <a:ext cx="10972800" cy="868680"/>
+            <a:off x="868680" y="384048"/>
+            <a:ext cx="10789920" cy="868680"/>
           </a:xfrm>
         </p:spPr>
         <p:txBody>
@@ -4257,8 +4697,8 @@
         </p:nvSpPr>
         <p:spPr>
           <a:xfrm>
-            <a:off x="658368" y="1481328"/>
-            <a:ext cx="10972800" cy="4846320"/>
+            <a:off x="886968" y="1481328"/>
+            <a:ext cx="10789920" cy="4846320"/>
           </a:xfrm>
         </p:spPr>
         <p:txBody>
@@ -4334,13 +4774,13 @@
       </p:sp>
       <p:sp>
         <p:nvSpPr>
-          <p:cNvPr id="4" name="Rectangle 3"/>
+          <p:cNvPr id="6" name="Rectangle 5"/>
           <p:cNvSpPr/>
           <p:nvPr/>
         </p:nvSpPr>
         <p:spPr>
           <a:xfrm>
-            <a:off x="658368" y="1261872"/>
+            <a:off x="886968" y="1261872"/>
             <a:ext cx="3108960" cy="36576"/>
           </a:xfrm>
           <a:prstGeom prst="rect">

--- a/ppt/solar-farm-monitoring.pptx
+++ b/ppt/solar-farm-monitoring.pptx
@@ -3108,7 +3108,7 @@
             <a:avLst/>
           </a:prstGeom>
           <a:solidFill>
-            <a:srgbClr val="A9791A"/>
+            <a:srgbClr val="1B2024"/>
           </a:solidFill>
           <a:ln>
             <a:noFill/>
@@ -3139,58 +3139,14 @@
       </p:sp>
       <p:sp>
         <p:nvSpPr>
-          <p:cNvPr id="3" name="Rectangle 2"/>
-          <p:cNvSpPr/>
+          <p:cNvPr id="3" name="TextBox 2"/>
+          <p:cNvSpPr txBox="1"/>
           <p:nvPr/>
         </p:nvSpPr>
         <p:spPr>
           <a:xfrm>
-            <a:off x="457200" y="457200"/>
-            <a:ext cx="11277295" cy="5943600"/>
-          </a:xfrm>
-          <a:prstGeom prst="rect">
-            <a:avLst/>
-          </a:prstGeom>
-          <a:noFill/>
-          <a:ln w="19050">
-            <a:solidFill>
-              <a:srgbClr val="E0D0AE"/>
-            </a:solidFill>
-          </a:ln>
-          <a:effectLst/>
-        </p:spPr>
-        <p:style>
-          <a:lnRef idx="1">
-            <a:schemeClr val="accent1"/>
-          </a:lnRef>
-          <a:fillRef idx="3">
-            <a:schemeClr val="accent1"/>
-          </a:fillRef>
-          <a:effectRef idx="2">
-            <a:schemeClr val="accent1"/>
-          </a:effectRef>
-          <a:fontRef idx="minor">
-            <a:schemeClr val="lt1"/>
-          </a:fontRef>
-        </p:style>
-        <p:txBody>
-          <a:bodyPr rtlCol="0" anchor="ctr"/>
-          <a:lstStyle/>
-          <a:p>
-            <a:pPr algn="ctr"/>
-          </a:p>
-        </p:txBody>
-      </p:sp>
-      <p:sp>
-        <p:nvSpPr>
-          <p:cNvPr id="4" name="TextBox 3"/>
-          <p:cNvSpPr txBox="1"/>
-          <p:nvPr/>
-        </p:nvSpPr>
-        <p:spPr>
-          <a:xfrm>
-            <a:off x="1188720" y="2103120"/>
-            <a:ext cx="9784080" cy="1783080"/>
+            <a:off x="914400" y="2103120"/>
+            <a:ext cx="10332720" cy="1783080"/>
           </a:xfrm>
           <a:prstGeom prst="rect">
             <a:avLst/>
@@ -3207,9 +3163,9 @@
             <a:r>
               <a:rPr sz="3400" b="1" i="0">
                 <a:solidFill>
-                  <a:srgbClr val="FFFFFF"/>
-                </a:solidFill>
-                <a:latin typeface="Franklin Gothic Medium"/>
+                  <a:srgbClr val="BAA563"/>
+                </a:solidFill>
+                <a:latin typeface="Constantia"/>
               </a:rPr>
               <a:t>Solar Farm Performance Monitoring</a:t>
             </a:r>
@@ -3218,7 +3174,7 @@
       </p:sp>
       <p:sp>
         <p:nvSpPr>
-          <p:cNvPr id="5" name="TextBox 4"/>
+          <p:cNvPr id="4" name="TextBox 3"/>
           <p:cNvSpPr txBox="1"/>
           <p:nvPr/>
         </p:nvSpPr>
@@ -3240,11 +3196,11 @@
           <a:p>
             <a:pPr algn="ctr"/>
             <a:r>
-              <a:rPr sz="1700" b="0" i="1">
-                <a:solidFill>
-                  <a:srgbClr val="E6D9BE"/>
-                </a:solidFill>
-                <a:latin typeface="Calibri"/>
+              <a:rPr sz="1800" b="0" i="1">
+                <a:solidFill>
+                  <a:srgbClr val="C7CFCB"/>
+                </a:solidFill>
+                <a:latin typeface="Georgia"/>
               </a:rPr>
               <a:t>An edge-to-cloud pipeline that watches two panel arrays live</a:t>
             </a:r>
@@ -3253,14 +3209,14 @@
       </p:sp>
       <p:sp>
         <p:nvSpPr>
-          <p:cNvPr id="6" name="TextBox 5"/>
+          <p:cNvPr id="5" name="TextBox 4"/>
           <p:cNvSpPr txBox="1"/>
           <p:nvPr/>
         </p:nvSpPr>
         <p:spPr>
           <a:xfrm>
             <a:off x="1371600" y="4800600"/>
-            <a:ext cx="9418320" cy="1280160"/>
+            <a:ext cx="9418320" cy="1371600"/>
           </a:xfrm>
           <a:prstGeom prst="rect">
             <a:avLst/>
@@ -3277,9 +3233,9 @@
             <a:r>
               <a:rPr sz="1250" b="0" i="0">
                 <a:solidFill>
-                  <a:srgbClr val="DCC9A3"/>
-                </a:solidFill>
-                <a:latin typeface="Calibri"/>
+                  <a:srgbClr val="98A3A0"/>
+                </a:solidFill>
+                <a:latin typeface="Georgia"/>
               </a:rPr>
               <a:t>MSc in Cloud Computing   ·   Fog and Edge Computing (H9FECC)</a:t>
             </a:r>
@@ -3289,9 +3245,9 @@
             <a:r>
               <a:rPr sz="1250" b="0" i="0">
                 <a:solidFill>
-                  <a:srgbClr val="DCC9A3"/>
-                </a:solidFill>
-                <a:latin typeface="Calibri"/>
+                  <a:srgbClr val="98A3A0"/>
+                </a:solidFill>
+                <a:latin typeface="Georgia"/>
               </a:rPr>
               <a:t>National College of Ireland</a:t>
             </a:r>
@@ -3318,20 +3274,20 @@
       <p:grpSpPr/>
       <p:sp>
         <p:nvSpPr>
-          <p:cNvPr id="5" name="Rectangle 4"/>
+          <p:cNvPr id="4" name="Rectangle 3"/>
           <p:cNvSpPr/>
           <p:nvPr/>
         </p:nvSpPr>
         <p:spPr>
           <a:xfrm>
-            <a:off x="0" y="0"/>
-            <a:ext cx="502920" cy="6858000"/>
+            <a:off x="-45720" y="-45720"/>
+            <a:ext cx="12344400" cy="6949440"/>
           </a:xfrm>
           <a:prstGeom prst="rect">
             <a:avLst/>
           </a:prstGeom>
           <a:solidFill>
-            <a:srgbClr val="A9791A"/>
+            <a:srgbClr val="F4F1E8"/>
           </a:solidFill>
           <a:ln>
             <a:noFill/>
@@ -3362,20 +3318,156 @@
       </p:sp>
       <p:sp>
         <p:nvSpPr>
-          <p:cNvPr id="4" name="Rectangle 3"/>
+          <p:cNvPr id="2" name="Title 1"/>
+          <p:cNvSpPr>
+            <a:spLocks noGrp="1"/>
+          </p:cNvSpPr>
+          <p:nvPr>
+            <p:ph type="title"/>
+          </p:nvPr>
+        </p:nvSpPr>
+        <p:spPr>
+          <a:xfrm>
+            <a:off x="640080" y="384048"/>
+            <a:ext cx="10972800" cy="868680"/>
+          </a:xfrm>
+        </p:spPr>
+        <p:txBody>
+          <a:bodyPr wrap="square" anchor="t"/>
+          <a:lstStyle/>
+          <a:p>
+            <a:pPr algn="l"/>
+            <a:r>
+              <a:rPr b="1" sz="2400">
+                <a:solidFill>
+                  <a:srgbClr val="9A7B1A"/>
+                </a:solidFill>
+                <a:latin typeface="Constantia"/>
+              </a:rPr>
+              <a:t>The problem: periodic checks miss slow failures</a:t>
+            </a:r>
+          </a:p>
+        </p:txBody>
+      </p:sp>
+      <p:sp>
+        <p:nvSpPr>
+          <p:cNvPr id="3" name="Content Placeholder 2"/>
+          <p:cNvSpPr>
+            <a:spLocks noGrp="1"/>
+          </p:cNvSpPr>
+          <p:nvPr>
+            <p:ph idx="1"/>
+          </p:nvPr>
+        </p:nvSpPr>
+        <p:spPr>
+          <a:xfrm>
+            <a:off x="658368" y="1481328"/>
+            <a:ext cx="10972800" cy="4846320"/>
+          </a:xfrm>
+        </p:spPr>
+        <p:txBody>
+          <a:bodyPr wrap="square">
+            <a:normAutofit/>
+          </a:bodyPr>
+          <a:lstStyle/>
+          <a:p>
+            <a:pPr>
+              <a:spcAft>
+                <a:spcPts val="900"/>
+              </a:spcAft>
+            </a:pPr>
+            <a:r>
+              <a:rPr sz="1700" b="0">
+                <a:solidFill>
+                  <a:srgbClr val="232A26"/>
+                </a:solidFill>
+                <a:latin typeface="Georgia"/>
+              </a:rPr>
+              <a:t>Solar panels lose conversion efficiency as they run hotter: an array's thermal health score falls from 100 at 45 °C to 0 at 72 °C, so heat quietly erodes output long before anything visibly breaks.</a:t>
+            </a:r>
+          </a:p>
+          <a:p>
+            <a:pPr>
+              <a:spcAft>
+                <a:spcPts val="900"/>
+              </a:spcAft>
+            </a:pPr>
+            <a:r>
+              <a:rPr sz="1700" b="0">
+                <a:solidFill>
+                  <a:srgbClr val="232A26"/>
+                </a:solidFill>
+                <a:latin typeface="Georgia"/>
+              </a:rPr>
+              <a:t>Dust builds up gradually: the system raises a cleaning alert once average soiling passes 25 percent, a slow drift that a scheduled walk-through will almost never time correctly.</a:t>
+            </a:r>
+          </a:p>
+          <a:p>
+            <a:pPr>
+              <a:spcAft>
+                <a:spcPts val="900"/>
+              </a:spcAft>
+            </a:pPr>
+            <a:r>
+              <a:rPr sz="1700" b="0">
+                <a:solidFill>
+                  <a:srgbClr val="232A26"/>
+                </a:solidFill>
+                <a:latin typeface="Georgia"/>
+              </a:rPr>
+              <a:t>A fault that appears between manual inspections keeps costing energy, silently, until someone happens to look at that array.</a:t>
+            </a:r>
+          </a:p>
+          <a:p>
+            <a:pPr>
+              <a:spcAft>
+                <a:spcPts val="900"/>
+              </a:spcAft>
+            </a:pPr>
+            <a:r>
+              <a:rPr sz="1700" b="0">
+                <a:solidFill>
+                  <a:srgbClr val="232A26"/>
+                </a:solidFill>
+                <a:latin typeface="Georgia"/>
+              </a:rPr>
+              <a:t>Panel temperature climbs from 45 to 72 °C, the range over which modelled output health slides from 100 down to 0.</a:t>
+            </a:r>
+          </a:p>
+          <a:p>
+            <a:pPr>
+              <a:spcAft>
+                <a:spcPts val="900"/>
+              </a:spcAft>
+            </a:pPr>
+            <a:r>
+              <a:rPr sz="1700" b="0">
+                <a:solidFill>
+                  <a:srgbClr val="232A26"/>
+                </a:solidFill>
+                <a:latin typeface="Georgia"/>
+              </a:rPr>
+              <a:t>Ten sensor streams run across two arrays, each sampling every 2 to 5 seconds, far too much data to check by hand.</a:t>
+            </a:r>
+          </a:p>
+        </p:txBody>
+      </p:sp>
+      <p:sp>
+        <p:nvSpPr>
+          <p:cNvPr id="5" name="Rectangle 4"/>
           <p:cNvSpPr/>
           <p:nvPr/>
         </p:nvSpPr>
         <p:spPr>
           <a:xfrm>
-            <a:off x="-45720" y="-45720"/>
-            <a:ext cx="12344400" cy="6949440"/>
+            <a:off x="658368" y="1261872"/>
+            <a:ext cx="3108960" cy="54864"/>
           </a:xfrm>
           <a:prstGeom prst="rect">
             <a:avLst/>
           </a:prstGeom>
           <a:solidFill>
-            <a:srgbClr val="F6F1E8"/>
+            <a:srgbClr val="9A7B1A"/>
           </a:solidFill>
           <a:ln>
             <a:noFill/>
@@ -3404,158 +3496,40 @@
           </a:p>
         </p:txBody>
       </p:sp>
-      <p:sp>
-        <p:nvSpPr>
-          <p:cNvPr id="2" name="Title 1"/>
-          <p:cNvSpPr>
-            <a:spLocks noGrp="1"/>
-          </p:cNvSpPr>
-          <p:nvPr>
-            <p:ph type="title"/>
-          </p:nvPr>
+    </p:spTree>
+  </p:cSld>
+  <p:clrMapOvr>
+    <a:masterClrMapping/>
+  </p:clrMapOvr>
+</p:sld>
+</file>
+
+<file path=ppt/slides/slide3.xml><?xml version="1.0" encoding="utf-8"?>
+<p:sld xmlns:a="http://schemas.openxmlformats.org/drawingml/2006/main" xmlns:p="http://schemas.openxmlformats.org/presentationml/2006/main" xmlns:r="http://schemas.openxmlformats.org/officeDocument/2006/relationships">
+  <p:cSld>
+    <p:spTree>
+      <p:nvGrpSpPr>
+        <p:cNvPr id="1" name=""/>
+        <p:cNvGrpSpPr/>
+        <p:nvPr/>
+      </p:nvGrpSpPr>
+      <p:grpSpPr/>
+      <p:sp>
+        <p:nvSpPr>
+          <p:cNvPr id="4" name="Rectangle 3"/>
+          <p:cNvSpPr/>
+          <p:nvPr/>
         </p:nvSpPr>
         <p:spPr>
           <a:xfrm>
-            <a:off x="868680" y="384048"/>
-            <a:ext cx="10789920" cy="868680"/>
-          </a:xfrm>
-        </p:spPr>
-        <p:txBody>
-          <a:bodyPr wrap="square" anchor="t"/>
-          <a:lstStyle/>
-          <a:p>
-            <a:pPr algn="l"/>
-            <a:r>
-              <a:rPr b="1" sz="2400">
-                <a:solidFill>
-                  <a:srgbClr val="A9791A"/>
-                </a:solidFill>
-                <a:latin typeface="Franklin Gothic Medium"/>
-              </a:rPr>
-              <a:t>The problem: periodic checks miss slow failures</a:t>
-            </a:r>
-          </a:p>
-        </p:txBody>
-      </p:sp>
-      <p:sp>
-        <p:nvSpPr>
-          <p:cNvPr id="3" name="Content Placeholder 2"/>
-          <p:cNvSpPr>
-            <a:spLocks noGrp="1"/>
-          </p:cNvSpPr>
-          <p:nvPr>
-            <p:ph idx="1"/>
-          </p:nvPr>
-        </p:nvSpPr>
-        <p:spPr>
-          <a:xfrm>
-            <a:off x="886968" y="1481328"/>
-            <a:ext cx="10789920" cy="4846320"/>
-          </a:xfrm>
-        </p:spPr>
-        <p:txBody>
-          <a:bodyPr wrap="square">
-            <a:normAutofit/>
-          </a:bodyPr>
-          <a:lstStyle/>
-          <a:p>
-            <a:pPr>
-              <a:spcAft>
-                <a:spcPts val="900"/>
-              </a:spcAft>
-            </a:pPr>
-            <a:r>
-              <a:rPr sz="1700" b="0">
-                <a:solidFill>
-                  <a:srgbClr val="232A26"/>
-                </a:solidFill>
-                <a:latin typeface="Calibri"/>
-              </a:rPr>
-              <a:t>Solar panels lose conversion efficiency as they run hotter: an array's thermal health score falls from 100 at 45 °C to 0 at 72 °C, so heat quietly erodes output long before anything visibly breaks.</a:t>
-            </a:r>
-          </a:p>
-          <a:p>
-            <a:pPr>
-              <a:spcAft>
-                <a:spcPts val="900"/>
-              </a:spcAft>
-            </a:pPr>
-            <a:r>
-              <a:rPr sz="1700" b="0">
-                <a:solidFill>
-                  <a:srgbClr val="232A26"/>
-                </a:solidFill>
-                <a:latin typeface="Calibri"/>
-              </a:rPr>
-              <a:t>Dust builds up gradually: the system raises a cleaning alert once average soiling passes 25 percent, a slow drift that a scheduled walk-through will almost never time correctly.</a:t>
-            </a:r>
-          </a:p>
-          <a:p>
-            <a:pPr>
-              <a:spcAft>
-                <a:spcPts val="900"/>
-              </a:spcAft>
-            </a:pPr>
-            <a:r>
-              <a:rPr sz="1700" b="1">
-                <a:solidFill>
-                  <a:srgbClr val="A9791A"/>
-                </a:solidFill>
-                <a:latin typeface="Calibri"/>
-              </a:rPr>
-              <a:t>A fault that appears between manual inspections keeps costing energy, silently, until someone happens to look at that array.</a:t>
-            </a:r>
-          </a:p>
-          <a:p>
-            <a:pPr>
-              <a:spcAft>
-                <a:spcPts val="900"/>
-              </a:spcAft>
-            </a:pPr>
-            <a:r>
-              <a:rPr sz="1700" b="0">
-                <a:solidFill>
-                  <a:srgbClr val="232A26"/>
-                </a:solidFill>
-                <a:latin typeface="Calibri"/>
-              </a:rPr>
-              <a:t>Panel temperature climbs from 45 to 72 °C, the range over which modelled output health slides from 100 down to 0.</a:t>
-            </a:r>
-          </a:p>
-          <a:p>
-            <a:pPr>
-              <a:spcAft>
-                <a:spcPts val="900"/>
-              </a:spcAft>
-            </a:pPr>
-            <a:r>
-              <a:rPr sz="1700" b="0">
-                <a:solidFill>
-                  <a:srgbClr val="232A26"/>
-                </a:solidFill>
-                <a:latin typeface="Calibri"/>
-              </a:rPr>
-              <a:t>Ten sensor streams run across two arrays, each sampling every 2 to 5 seconds, far too much data to check by hand.</a:t>
-            </a:r>
-          </a:p>
-        </p:txBody>
-      </p:sp>
-      <p:sp>
-        <p:nvSpPr>
-          <p:cNvPr id="6" name="Rectangle 5"/>
-          <p:cNvSpPr/>
-          <p:nvPr/>
-        </p:nvSpPr>
-        <p:spPr>
-          <a:xfrm>
-            <a:off x="886968" y="1261872"/>
-            <a:ext cx="3108960" cy="36576"/>
+            <a:off x="-45720" y="-45720"/>
+            <a:ext cx="12344400" cy="6949440"/>
           </a:xfrm>
           <a:prstGeom prst="rect">
             <a:avLst/>
           </a:prstGeom>
           <a:solidFill>
-            <a:srgbClr val="A9791A"/>
+            <a:srgbClr val="F4F1E8"/>
           </a:solidFill>
           <a:ln>
             <a:noFill/>
@@ -3584,24 +3558,174 @@
           </a:p>
         </p:txBody>
       </p:sp>
-    </p:spTree>
-  </p:cSld>
-  <p:clrMapOvr>
-    <a:masterClrMapping/>
-  </p:clrMapOvr>
-</p:sld>
-</file>
-
-<file path=ppt/slides/slide3.xml><?xml version="1.0" encoding="utf-8"?>
-<p:sld xmlns:a="http://schemas.openxmlformats.org/drawingml/2006/main" xmlns:p="http://schemas.openxmlformats.org/presentationml/2006/main" xmlns:r="http://schemas.openxmlformats.org/officeDocument/2006/relationships">
-  <p:cSld>
-    <p:spTree>
-      <p:nvGrpSpPr>
-        <p:cNvPr id="1" name=""/>
-        <p:cNvGrpSpPr/>
-        <p:nvPr/>
-      </p:nvGrpSpPr>
-      <p:grpSpPr/>
+      <p:sp>
+        <p:nvSpPr>
+          <p:cNvPr id="2" name="Title 1"/>
+          <p:cNvSpPr>
+            <a:spLocks noGrp="1"/>
+          </p:cNvSpPr>
+          <p:nvPr>
+            <p:ph type="title"/>
+          </p:nvPr>
+        </p:nvSpPr>
+        <p:spPr>
+          <a:xfrm>
+            <a:off x="640080" y="384048"/>
+            <a:ext cx="10972800" cy="868680"/>
+          </a:xfrm>
+        </p:spPr>
+        <p:txBody>
+          <a:bodyPr wrap="square" anchor="t"/>
+          <a:lstStyle/>
+          <a:p>
+            <a:pPr algn="l"/>
+            <a:r>
+              <a:rPr b="1" sz="2700">
+                <a:solidFill>
+                  <a:srgbClr val="9A7B1A"/>
+                </a:solidFill>
+                <a:latin typeface="Constantia"/>
+              </a:rPr>
+              <a:t>How it works: edge first, cloud second</a:t>
+            </a:r>
+          </a:p>
+        </p:txBody>
+      </p:sp>
+      <p:sp>
+        <p:nvSpPr>
+          <p:cNvPr id="3" name="Content Placeholder 2"/>
+          <p:cNvSpPr>
+            <a:spLocks noGrp="1"/>
+          </p:cNvSpPr>
+          <p:nvPr>
+            <p:ph idx="1"/>
+          </p:nvPr>
+        </p:nvSpPr>
+        <p:spPr>
+          <a:xfrm>
+            <a:off x="658368" y="1481328"/>
+            <a:ext cx="10972800" cy="4846320"/>
+          </a:xfrm>
+        </p:spPr>
+        <p:txBody>
+          <a:bodyPr wrap="square">
+            <a:normAutofit/>
+          </a:bodyPr>
+          <a:lstStyle/>
+          <a:p>
+            <a:pPr>
+              <a:spcAft>
+                <a:spcPts val="900"/>
+              </a:spcAft>
+            </a:pPr>
+            <a:r>
+              <a:rPr sz="1700" b="0">
+                <a:solidFill>
+                  <a:srgbClr val="232A26"/>
+                </a:solidFill>
+                <a:latin typeface="Georgia"/>
+              </a:rPr>
+              <a:t>Ten sensors stream irradiance, panel temperature, inverter output, DC voltage and soiling across two arrays.</a:t>
+            </a:r>
+          </a:p>
+          <a:p>
+            <a:pPr>
+              <a:spcAft>
+                <a:spcPts val="900"/>
+              </a:spcAft>
+            </a:pPr>
+            <a:r>
+              <a:rPr sz="1700" b="0">
+                <a:solidFill>
+                  <a:srgbClr val="232A26"/>
+                </a:solidFill>
+                <a:latin typeface="Georgia"/>
+              </a:rPr>
+              <a:t>The fog node buffers, windows, aggregates and raises alerts, producing one summary per window.</a:t>
+            </a:r>
+          </a:p>
+          <a:p>
+            <a:pPr>
+              <a:spcAft>
+                <a:spcPts val="900"/>
+              </a:spcAft>
+            </a:pPr>
+            <a:r>
+              <a:rPr sz="1700" b="0">
+                <a:solidFill>
+                  <a:srgbClr val="232A26"/>
+                </a:solidFill>
+                <a:latin typeface="Georgia"/>
+              </a:rPr>
+              <a:t>Amazon SQS queues the window summaries for the backend.</a:t>
+            </a:r>
+          </a:p>
+          <a:p>
+            <a:pPr>
+              <a:spcAft>
+                <a:spcPts val="900"/>
+              </a:spcAft>
+            </a:pPr>
+            <a:r>
+              <a:rPr sz="1700" b="0">
+                <a:solidFill>
+                  <a:srgbClr val="232A26"/>
+                </a:solidFill>
+                <a:latin typeface="Georgia"/>
+              </a:rPr>
+              <a:t>AWS Lambda provides serverless ingest, triggered straight off the queue.</a:t>
+            </a:r>
+          </a:p>
+          <a:p>
+            <a:pPr>
+              <a:spcAft>
+                <a:spcPts val="900"/>
+              </a:spcAft>
+            </a:pPr>
+            <a:r>
+              <a:rPr sz="1700" b="0">
+                <a:solidFill>
+                  <a:srgbClr val="232A26"/>
+                </a:solidFill>
+                <a:latin typeface="Georgia"/>
+              </a:rPr>
+              <a:t>Amazon DynamoDB stores the windowed records per array and sensor.</a:t>
+            </a:r>
+          </a:p>
+          <a:p>
+            <a:pPr>
+              <a:spcAft>
+                <a:spcPts val="900"/>
+              </a:spcAft>
+            </a:pPr>
+            <a:r>
+              <a:rPr sz="1700" b="0">
+                <a:solidFill>
+                  <a:srgbClr val="232A26"/>
+                </a:solidFill>
+                <a:latin typeface="Georgia"/>
+              </a:rPr>
+              <a:t>A live dashboard on Amazon S3 and API Gateway shows the per-array efficiency heatmap.</a:t>
+            </a:r>
+          </a:p>
+          <a:p>
+            <a:pPr>
+              <a:spcAft>
+                <a:spcPts val="900"/>
+              </a:spcAft>
+            </a:pPr>
+            <a:r>
+              <a:rPr sz="1700" b="0">
+                <a:solidFill>
+                  <a:srgbClr val="232A26"/>
+                </a:solidFill>
+                <a:latin typeface="Georgia"/>
+              </a:rPr>
+              <a:t>Verified end to end locally: the whole pipeline runs on Docker with an AWS emulator standing in for SQS, Lambda and DynamoDB, and one scripted step deploys the identical pipeline to real AWS.</a:t>
+            </a:r>
+          </a:p>
+        </p:txBody>
+      </p:sp>
       <p:sp>
         <p:nvSpPr>
           <p:cNvPr id="5" name="Rectangle 4"/>
@@ -3610,14 +3734,14 @@
         </p:nvSpPr>
         <p:spPr>
           <a:xfrm>
-            <a:off x="0" y="0"/>
-            <a:ext cx="502920" cy="6858000"/>
+            <a:off x="658368" y="1261872"/>
+            <a:ext cx="3108960" cy="54864"/>
           </a:xfrm>
           <a:prstGeom prst="rect">
             <a:avLst/>
           </a:prstGeom>
           <a:solidFill>
-            <a:srgbClr val="A9791A"/>
+            <a:srgbClr val="9A7B1A"/>
           </a:solidFill>
           <a:ln>
             <a:noFill/>
@@ -3646,6 +3770,24 @@
           </a:p>
         </p:txBody>
       </p:sp>
+    </p:spTree>
+  </p:cSld>
+  <p:clrMapOvr>
+    <a:masterClrMapping/>
+  </p:clrMapOvr>
+</p:sld>
+</file>
+
+<file path=ppt/slides/slide4.xml><?xml version="1.0" encoding="utf-8"?>
+<p:sld xmlns:a="http://schemas.openxmlformats.org/drawingml/2006/main" xmlns:p="http://schemas.openxmlformats.org/presentationml/2006/main" xmlns:r="http://schemas.openxmlformats.org/officeDocument/2006/relationships">
+  <p:cSld>
+    <p:spTree>
+      <p:nvGrpSpPr>
+        <p:cNvPr id="1" name=""/>
+        <p:cNvGrpSpPr/>
+        <p:nvPr/>
+      </p:nvGrpSpPr>
+      <p:grpSpPr/>
       <p:sp>
         <p:nvSpPr>
           <p:cNvPr id="4" name="Rectangle 3"/>
@@ -3661,7 +3803,7 @@
             <a:avLst/>
           </a:prstGeom>
           <a:solidFill>
-            <a:srgbClr val="F6F1E8"/>
+            <a:srgbClr val="F4F1E8"/>
           </a:solidFill>
           <a:ln>
             <a:noFill/>
@@ -3702,8 +3844,8 @@
         </p:nvSpPr>
         <p:spPr>
           <a:xfrm>
-            <a:off x="868680" y="384048"/>
-            <a:ext cx="10789920" cy="868680"/>
+            <a:off x="640080" y="384048"/>
+            <a:ext cx="10972800" cy="868680"/>
           </a:xfrm>
         </p:spPr>
         <p:txBody>
@@ -3714,11 +3856,11 @@
             <a:r>
               <a:rPr b="1" sz="2700">
                 <a:solidFill>
-                  <a:srgbClr val="A9791A"/>
-                </a:solidFill>
-                <a:latin typeface="Franklin Gothic Medium"/>
+                  <a:srgbClr val="9A7B1A"/>
+                </a:solidFill>
+                <a:latin typeface="Constantia"/>
               </a:rPr>
-              <a:t>How it works: edge first, cloud second</a:t>
+              <a:t>Demonstration highlights</a:t>
             </a:r>
           </a:p>
         </p:txBody>
@@ -3735,8 +3877,8 @@
         </p:nvSpPr>
         <p:spPr>
           <a:xfrm>
-            <a:off x="886968" y="1481328"/>
-            <a:ext cx="10789920" cy="4846320"/>
+            <a:off x="658368" y="1481328"/>
+            <a:ext cx="5760720" cy="4754880"/>
           </a:xfrm>
         </p:spPr>
         <p:txBody>
@@ -3747,133 +3889,101 @@
           <a:p>
             <a:pPr>
               <a:spcAft>
-                <a:spcPts val="900"/>
+                <a:spcPts val="800"/>
               </a:spcAft>
             </a:pPr>
             <a:r>
-              <a:rPr sz="1700" b="0">
+              <a:rPr sz="1500" b="0">
                 <a:solidFill>
                   <a:srgbClr val="232A26"/>
                 </a:solidFill>
-                <a:latin typeface="Calibri"/>
+                <a:latin typeface="Georgia"/>
               </a:rPr>
-              <a:t>Ten sensors stream irradiance, panel temperature, inverter output, DC voltage and soiling across two arrays.</a:t>
+              <a:t>Dashboard during a local end-to-end run: all four pipeline health checks up, the live efficiency heatmap and per-array readings.</a:t>
             </a:r>
           </a:p>
           <a:p>
             <a:pPr>
               <a:spcAft>
-                <a:spcPts val="900"/>
+                <a:spcPts val="800"/>
               </a:spcAft>
             </a:pPr>
             <a:r>
-              <a:rPr sz="1700" b="0">
+              <a:rPr sz="1500" b="0">
                 <a:solidFill>
                   <a:srgbClr val="232A26"/>
                 </a:solidFill>
-                <a:latin typeface="Calibri"/>
+                <a:latin typeface="Georgia"/>
               </a:rPr>
-              <a:t>The fog node buffers, windows, aggregates and raises alerts, producing one summary per window.</a:t>
+              <a:t>Threshold alerts cover thermal derate risk, inverter underperformance, undervoltage and cleaning required.</a:t>
             </a:r>
           </a:p>
           <a:p>
             <a:pPr>
               <a:spcAft>
-                <a:spcPts val="900"/>
+                <a:spcPts val="800"/>
               </a:spcAft>
             </a:pPr>
             <a:r>
-              <a:rPr sz="1700" b="0">
+              <a:rPr sz="1500" b="0">
                 <a:solidFill>
                   <a:srgbClr val="232A26"/>
                 </a:solidFill>
-                <a:latin typeface="Calibri"/>
+                <a:latin typeface="Georgia"/>
               </a:rPr>
-              <a:t>Amazon SQS queues the window summaries for the backend.</a:t>
+              <a:t>110 automated tests pass across sensors, fog node, backend and dashboard.</a:t>
             </a:r>
           </a:p>
           <a:p>
             <a:pPr>
               <a:spcAft>
-                <a:spcPts val="900"/>
+                <a:spcPts val="800"/>
               </a:spcAft>
             </a:pPr>
             <a:r>
-              <a:rPr sz="1700" b="0">
+              <a:rPr sz="1500" b="0">
                 <a:solidFill>
                   <a:srgbClr val="232A26"/>
                 </a:solidFill>
-                <a:latin typeface="Calibri"/>
+                <a:latin typeface="Georgia"/>
               </a:rPr>
-              <a:t>AWS Lambda provides serverless ingest, triggered straight off the queue.</a:t>
+              <a:t>4 of 4 pipeline health checks green: gateway, queue, processor and pipeline.</a:t>
             </a:r>
           </a:p>
           <a:p>
             <a:pPr>
               <a:spcAft>
-                <a:spcPts val="900"/>
+                <a:spcPts val="800"/>
               </a:spcAft>
             </a:pPr>
             <a:r>
-              <a:rPr sz="1700" b="0">
+              <a:rPr sz="1500" b="0">
                 <a:solidFill>
                   <a:srgbClr val="232A26"/>
                 </a:solidFill>
-                <a:latin typeface="Calibri"/>
+                <a:latin typeface="Georgia"/>
               </a:rPr>
-              <a:t>Amazon DynamoDB stores the windowed records per array and sensor.</a:t>
-            </a:r>
-          </a:p>
-          <a:p>
-            <a:pPr>
-              <a:spcAft>
-                <a:spcPts val="900"/>
-              </a:spcAft>
-            </a:pPr>
-            <a:r>
-              <a:rPr sz="1700" b="0">
-                <a:solidFill>
-                  <a:srgbClr val="232A26"/>
-                </a:solidFill>
-                <a:latin typeface="Calibri"/>
-              </a:rPr>
-              <a:t>A live dashboard on Amazon S3 and API Gateway shows the per-array efficiency heatmap.</a:t>
-            </a:r>
-          </a:p>
-          <a:p>
-            <a:pPr>
-              <a:spcAft>
-                <a:spcPts val="900"/>
-              </a:spcAft>
-            </a:pPr>
-            <a:r>
-              <a:rPr sz="1700" b="1">
-                <a:solidFill>
-                  <a:srgbClr val="A9791A"/>
-                </a:solidFill>
-                <a:latin typeface="Calibri"/>
-              </a:rPr>
-              <a:t>Verified end to end locally: the whole pipeline runs on Docker with an AWS emulator standing in for SQS, Lambda and DynamoDB, and one scripted step deploys the identical pipeline to real AWS.</a:t>
-            </a:r>
-          </a:p>
-        </p:txBody>
-      </p:sp>
-      <p:sp>
-        <p:nvSpPr>
-          <p:cNvPr id="6" name="Rectangle 5"/>
+              <a:t>A 2,000-message burst was pushed through the queue by 32 parallel senders in the load test.</a:t>
+            </a:r>
+          </a:p>
+        </p:txBody>
+      </p:sp>
+      <p:sp>
+        <p:nvSpPr>
+          <p:cNvPr id="5" name="Rectangle 4"/>
           <p:cNvSpPr/>
           <p:nvPr/>
         </p:nvSpPr>
         <p:spPr>
           <a:xfrm>
-            <a:off x="886968" y="1261872"/>
-            <a:ext cx="3108960" cy="36576"/>
+            <a:off x="658368" y="1261872"/>
+            <a:ext cx="3108960" cy="54864"/>
           </a:xfrm>
           <a:prstGeom prst="rect">
             <a:avLst/>
           </a:prstGeom>
           <a:solidFill>
-            <a:srgbClr val="A9791A"/>
+            <a:srgbClr val="9A7B1A"/>
           </a:solidFill>
           <a:ln>
             <a:noFill/>
@@ -3902,295 +4012,9 @@
           </a:p>
         </p:txBody>
       </p:sp>
-    </p:spTree>
-  </p:cSld>
-  <p:clrMapOvr>
-    <a:masterClrMapping/>
-  </p:clrMapOvr>
-</p:sld>
-</file>
-
-<file path=ppt/slides/slide4.xml><?xml version="1.0" encoding="utf-8"?>
-<p:sld xmlns:a="http://schemas.openxmlformats.org/drawingml/2006/main" xmlns:p="http://schemas.openxmlformats.org/presentationml/2006/main" xmlns:r="http://schemas.openxmlformats.org/officeDocument/2006/relationships">
-  <p:cSld>
-    <p:spTree>
-      <p:nvGrpSpPr>
-        <p:cNvPr id="1" name=""/>
-        <p:cNvGrpSpPr/>
-        <p:nvPr/>
-      </p:nvGrpSpPr>
-      <p:grpSpPr/>
-      <p:sp>
-        <p:nvSpPr>
-          <p:cNvPr id="5" name="Rectangle 4"/>
-          <p:cNvSpPr/>
-          <p:nvPr/>
-        </p:nvSpPr>
-        <p:spPr>
-          <a:xfrm>
-            <a:off x="0" y="0"/>
-            <a:ext cx="502920" cy="6858000"/>
-          </a:xfrm>
-          <a:prstGeom prst="rect">
-            <a:avLst/>
-          </a:prstGeom>
-          <a:solidFill>
-            <a:srgbClr val="A9791A"/>
-          </a:solidFill>
-          <a:ln>
-            <a:noFill/>
-          </a:ln>
-          <a:effectLst/>
-        </p:spPr>
-        <p:style>
-          <a:lnRef idx="1">
-            <a:schemeClr val="accent1"/>
-          </a:lnRef>
-          <a:fillRef idx="3">
-            <a:schemeClr val="accent1"/>
-          </a:fillRef>
-          <a:effectRef idx="2">
-            <a:schemeClr val="accent1"/>
-          </a:effectRef>
-          <a:fontRef idx="minor">
-            <a:schemeClr val="lt1"/>
-          </a:fontRef>
-        </p:style>
-        <p:txBody>
-          <a:bodyPr rtlCol="0" anchor="ctr"/>
-          <a:lstStyle/>
-          <a:p>
-            <a:pPr algn="ctr"/>
-          </a:p>
-        </p:txBody>
-      </p:sp>
-      <p:sp>
-        <p:nvSpPr>
-          <p:cNvPr id="4" name="Rectangle 3"/>
-          <p:cNvSpPr/>
-          <p:nvPr/>
-        </p:nvSpPr>
-        <p:spPr>
-          <a:xfrm>
-            <a:off x="-45720" y="-45720"/>
-            <a:ext cx="12344400" cy="6949440"/>
-          </a:xfrm>
-          <a:prstGeom prst="rect">
-            <a:avLst/>
-          </a:prstGeom>
-          <a:solidFill>
-            <a:srgbClr val="F6F1E8"/>
-          </a:solidFill>
-          <a:ln>
-            <a:noFill/>
-          </a:ln>
-          <a:effectLst/>
-        </p:spPr>
-        <p:style>
-          <a:lnRef idx="1">
-            <a:schemeClr val="accent1"/>
-          </a:lnRef>
-          <a:fillRef idx="3">
-            <a:schemeClr val="accent1"/>
-          </a:fillRef>
-          <a:effectRef idx="2">
-            <a:schemeClr val="accent1"/>
-          </a:effectRef>
-          <a:fontRef idx="minor">
-            <a:schemeClr val="lt1"/>
-          </a:fontRef>
-        </p:style>
-        <p:txBody>
-          <a:bodyPr rtlCol="0" anchor="ctr"/>
-          <a:lstStyle/>
-          <a:p>
-            <a:pPr algn="ctr"/>
-          </a:p>
-        </p:txBody>
-      </p:sp>
-      <p:sp>
-        <p:nvSpPr>
-          <p:cNvPr id="2" name="Title 1"/>
-          <p:cNvSpPr>
-            <a:spLocks noGrp="1"/>
-          </p:cNvSpPr>
-          <p:nvPr>
-            <p:ph type="title"/>
-          </p:nvPr>
-        </p:nvSpPr>
-        <p:spPr>
-          <a:xfrm>
-            <a:off x="868680" y="384048"/>
-            <a:ext cx="10789920" cy="868680"/>
-          </a:xfrm>
-        </p:spPr>
-        <p:txBody>
-          <a:bodyPr wrap="square" anchor="t"/>
-          <a:lstStyle/>
-          <a:p>
-            <a:pPr algn="l"/>
-            <a:r>
-              <a:rPr b="1" sz="2700">
-                <a:solidFill>
-                  <a:srgbClr val="A9791A"/>
-                </a:solidFill>
-                <a:latin typeface="Franklin Gothic Medium"/>
-              </a:rPr>
-              <a:t>Demonstration highlights</a:t>
-            </a:r>
-          </a:p>
-        </p:txBody>
-      </p:sp>
-      <p:sp>
-        <p:nvSpPr>
-          <p:cNvPr id="3" name="Content Placeholder 2"/>
-          <p:cNvSpPr>
-            <a:spLocks noGrp="1"/>
-          </p:cNvSpPr>
-          <p:nvPr>
-            <p:ph idx="1"/>
-          </p:nvPr>
-        </p:nvSpPr>
-        <p:spPr>
-          <a:xfrm>
-            <a:off x="886968" y="1481328"/>
-            <a:ext cx="5577840" cy="4754880"/>
-          </a:xfrm>
-        </p:spPr>
-        <p:txBody>
-          <a:bodyPr wrap="square">
-            <a:normAutofit/>
-          </a:bodyPr>
-          <a:lstStyle/>
-          <a:p>
-            <a:pPr>
-              <a:spcAft>
-                <a:spcPts val="800"/>
-              </a:spcAft>
-            </a:pPr>
-            <a:r>
-              <a:rPr sz="1500" b="0">
-                <a:solidFill>
-                  <a:srgbClr val="232A26"/>
-                </a:solidFill>
-                <a:latin typeface="Calibri"/>
-              </a:rPr>
-              <a:t>Dashboard during a local end-to-end run: all four pipeline health checks up, the live efficiency heatmap and per-array readings.</a:t>
-            </a:r>
-          </a:p>
-          <a:p>
-            <a:pPr>
-              <a:spcAft>
-                <a:spcPts val="800"/>
-              </a:spcAft>
-            </a:pPr>
-            <a:r>
-              <a:rPr sz="1500" b="0">
-                <a:solidFill>
-                  <a:srgbClr val="232A26"/>
-                </a:solidFill>
-                <a:latin typeface="Calibri"/>
-              </a:rPr>
-              <a:t>Threshold alerts cover thermal derate risk, inverter underperformance, undervoltage and cleaning required.</a:t>
-            </a:r>
-          </a:p>
-          <a:p>
-            <a:pPr>
-              <a:spcAft>
-                <a:spcPts val="800"/>
-              </a:spcAft>
-            </a:pPr>
-            <a:r>
-              <a:rPr sz="1500" b="1">
-                <a:solidFill>
-                  <a:srgbClr val="A9791A"/>
-                </a:solidFill>
-                <a:latin typeface="Calibri"/>
-              </a:rPr>
-              <a:t>110 automated tests pass across sensors, fog node, backend and dashboard.</a:t>
-            </a:r>
-          </a:p>
-          <a:p>
-            <a:pPr>
-              <a:spcAft>
-                <a:spcPts val="800"/>
-              </a:spcAft>
-            </a:pPr>
-            <a:r>
-              <a:rPr sz="1500" b="0">
-                <a:solidFill>
-                  <a:srgbClr val="232A26"/>
-                </a:solidFill>
-                <a:latin typeface="Calibri"/>
-              </a:rPr>
-              <a:t>4 of 4 pipeline health checks green: gateway, queue, processor and pipeline.</a:t>
-            </a:r>
-          </a:p>
-          <a:p>
-            <a:pPr>
-              <a:spcAft>
-                <a:spcPts val="800"/>
-              </a:spcAft>
-            </a:pPr>
-            <a:r>
-              <a:rPr sz="1500" b="0">
-                <a:solidFill>
-                  <a:srgbClr val="232A26"/>
-                </a:solidFill>
-                <a:latin typeface="Calibri"/>
-              </a:rPr>
-              <a:t>A 2,000-message burst was pushed through the queue by 32 parallel senders in the load test.</a:t>
-            </a:r>
-          </a:p>
-        </p:txBody>
-      </p:sp>
-      <p:sp>
-        <p:nvSpPr>
-          <p:cNvPr id="6" name="Rectangle 5"/>
-          <p:cNvSpPr/>
-          <p:nvPr/>
-        </p:nvSpPr>
-        <p:spPr>
-          <a:xfrm>
-            <a:off x="886968" y="1261872"/>
-            <a:ext cx="3108960" cy="36576"/>
-          </a:xfrm>
-          <a:prstGeom prst="rect">
-            <a:avLst/>
-          </a:prstGeom>
-          <a:solidFill>
-            <a:srgbClr val="A9791A"/>
-          </a:solidFill>
-          <a:ln>
-            <a:noFill/>
-          </a:ln>
-          <a:effectLst/>
-        </p:spPr>
-        <p:style>
-          <a:lnRef idx="1">
-            <a:schemeClr val="accent1"/>
-          </a:lnRef>
-          <a:fillRef idx="3">
-            <a:schemeClr val="accent1"/>
-          </a:fillRef>
-          <a:effectRef idx="2">
-            <a:schemeClr val="accent1"/>
-          </a:effectRef>
-          <a:fontRef idx="minor">
-            <a:schemeClr val="lt1"/>
-          </a:fontRef>
-        </p:style>
-        <p:txBody>
-          <a:bodyPr rtlCol="0" anchor="ctr"/>
-          <a:lstStyle/>
-          <a:p>
-            <a:pPr algn="ctr"/>
-          </a:p>
-        </p:txBody>
-      </p:sp>
       <p:pic>
         <p:nvPicPr>
-          <p:cNvPr id="7" name="Picture 6" descr="dashboard-desktop.png"/>
+          <p:cNvPr id="6" name="Picture 5" descr="dashboard-desktop.png"/>
           <p:cNvPicPr>
             <a:picLocks noChangeAspect="1"/>
           </p:cNvPicPr>
@@ -4204,7 +4028,7 @@
         </p:blipFill>
         <p:spPr>
           <a:xfrm>
-            <a:off x="7327956" y="1517904"/>
+            <a:off x="7282236" y="1517904"/>
             <a:ext cx="3814967" cy="4572000"/>
           </a:xfrm>
           <a:prstGeom prst="rect">
@@ -4232,20 +4056,20 @@
       <p:grpSpPr/>
       <p:sp>
         <p:nvSpPr>
-          <p:cNvPr id="5" name="Rectangle 4"/>
+          <p:cNvPr id="4" name="Rectangle 3"/>
           <p:cNvSpPr/>
           <p:nvPr/>
         </p:nvSpPr>
         <p:spPr>
           <a:xfrm>
-            <a:off x="0" y="0"/>
-            <a:ext cx="502920" cy="6858000"/>
+            <a:off x="-45720" y="-45720"/>
+            <a:ext cx="12344400" cy="6949440"/>
           </a:xfrm>
           <a:prstGeom prst="rect">
             <a:avLst/>
           </a:prstGeom>
           <a:solidFill>
-            <a:srgbClr val="A9791A"/>
+            <a:srgbClr val="F4F1E8"/>
           </a:solidFill>
           <a:ln>
             <a:noFill/>
@@ -4276,20 +4100,204 @@
       </p:sp>
       <p:sp>
         <p:nvSpPr>
-          <p:cNvPr id="4" name="Rectangle 3"/>
+          <p:cNvPr id="2" name="Title 1"/>
+          <p:cNvSpPr>
+            <a:spLocks noGrp="1"/>
+          </p:cNvSpPr>
+          <p:nvPr>
+            <p:ph type="title"/>
+          </p:nvPr>
+        </p:nvSpPr>
+        <p:spPr>
+          <a:xfrm>
+            <a:off x="640080" y="384048"/>
+            <a:ext cx="10972800" cy="868680"/>
+          </a:xfrm>
+        </p:spPr>
+        <p:txBody>
+          <a:bodyPr wrap="square" anchor="t"/>
+          <a:lstStyle/>
+          <a:p>
+            <a:pPr algn="l"/>
+            <a:r>
+              <a:rPr b="1" sz="2400">
+                <a:solidFill>
+                  <a:srgbClr val="9A7B1A"/>
+                </a:solidFill>
+                <a:latin typeface="Constantia"/>
+              </a:rPr>
+              <a:t>The hardest part: a buffer that never sits still</a:t>
+            </a:r>
+          </a:p>
+        </p:txBody>
+      </p:sp>
+      <p:sp>
+        <p:nvSpPr>
+          <p:cNvPr id="3" name="Content Placeholder 2"/>
+          <p:cNvSpPr>
+            <a:spLocks noGrp="1"/>
+          </p:cNvSpPr>
+          <p:nvPr>
+            <p:ph idx="1"/>
+          </p:nvPr>
+        </p:nvSpPr>
+        <p:spPr>
+          <a:xfrm>
+            <a:off x="658368" y="1481328"/>
+            <a:ext cx="10972800" cy="4846320"/>
+          </a:xfrm>
+        </p:spPr>
+        <p:txBody>
+          <a:bodyPr wrap="square">
+            <a:normAutofit/>
+          </a:bodyPr>
+          <a:lstStyle/>
+          <a:p>
+            <a:pPr>
+              <a:spcAft>
+                <a:spcPts val="600"/>
+              </a:spcAft>
+            </a:pPr>
+            <a:r>
+              <a:rPr sz="1500" b="0">
+                <a:solidFill>
+                  <a:srgbClr val="232A26"/>
+                </a:solidFill>
+                <a:latin typeface="Georgia"/>
+              </a:rPr>
+              <a:t>The problem:</a:t>
+            </a:r>
+          </a:p>
+          <a:p>
+            <a:pPr lvl="1">
+              <a:spcAft>
+                <a:spcPts val="600"/>
+              </a:spcAft>
+            </a:pPr>
+            <a:r>
+              <a:rPr sz="1300" b="0">
+                <a:solidFill>
+                  <a:srgbClr val="232A26"/>
+                </a:solidFill>
+                <a:latin typeface="Georgia"/>
+              </a:rPr>
+              <a:t>Every few seconds the fog node must take everything buffered so far and aggregate it into window summaries, while ten sensors keep writing new readings into that same buffer.</a:t>
+            </a:r>
+          </a:p>
+          <a:p>
+            <a:pPr>
+              <a:spcAft>
+                <a:spcPts val="600"/>
+              </a:spcAft>
+            </a:pPr>
+            <a:r>
+              <a:rPr sz="1500" b="0">
+                <a:solidFill>
+                  <a:srgbClr val="232A26"/>
+                </a:solidFill>
+                <a:latin typeface="Georgia"/>
+              </a:rPr>
+              <a:t>Why it is hard:</a:t>
+            </a:r>
+          </a:p>
+          <a:p>
+            <a:pPr lvl="1">
+              <a:spcAft>
+                <a:spcPts val="600"/>
+              </a:spcAft>
+            </a:pPr>
+            <a:r>
+              <a:rPr sz="1300" b="0">
+                <a:solidFill>
+                  <a:srgbClr val="232A26"/>
+                </a:solidFill>
+                <a:latin typeface="Georgia"/>
+              </a:rPr>
+              <a:t>One shared buffer and one lock means aggregation blocks ingest. Copying the buffer under the lock stalls every sensor at every window; skipping the lock loses or double-counts readings. A textbook reader-writer race.</a:t>
+            </a:r>
+          </a:p>
+          <a:p>
+            <a:pPr>
+              <a:spcAft>
+                <a:spcPts val="600"/>
+              </a:spcAft>
+            </a:pPr>
+            <a:r>
+              <a:rPr sz="1500" b="0">
+                <a:solidFill>
+                  <a:srgbClr val="232A26"/>
+                </a:solidFill>
+                <a:latin typeface="Georgia"/>
+              </a:rPr>
+              <a:t>The fix:</a:t>
+            </a:r>
+          </a:p>
+          <a:p>
+            <a:pPr lvl="1">
+              <a:spcAft>
+                <a:spcPts val="600"/>
+              </a:spcAft>
+            </a:pPr>
+            <a:r>
+              <a:rPr sz="1300" b="0">
+                <a:solidFill>
+                  <a:srgbClr val="232A26"/>
+                </a:solidFill>
+                <a:latin typeface="Georgia"/>
+              </a:rPr>
+              <a:t>Double buffering uses two buffers, one live and one flushing. The lock is held only for an instant pointer swap of the two, so aggregation works on the swapped-out data while new readings flow into the fresh buffer.</a:t>
+            </a:r>
+          </a:p>
+          <a:p>
+            <a:pPr>
+              <a:spcAft>
+                <a:spcPts val="600"/>
+              </a:spcAft>
+            </a:pPr>
+            <a:r>
+              <a:rPr sz="1500" b="0">
+                <a:solidFill>
+                  <a:srgbClr val="232A26"/>
+                </a:solidFill>
+                <a:latin typeface="Georgia"/>
+              </a:rPr>
+              <a:t>The flow: sensors write into the active buffer, a pointer swap under lock moves it to the flushing buffer, then the fog node aggregates and publishes.</a:t>
+            </a:r>
+          </a:p>
+          <a:p>
+            <a:pPr>
+              <a:spcAft>
+                <a:spcPts val="600"/>
+              </a:spcAft>
+            </a:pPr>
+            <a:r>
+              <a:rPr sz="1500" b="0">
+                <a:solidFill>
+                  <a:srgbClr val="232A26"/>
+                </a:solidFill>
+                <a:latin typeface="Georgia"/>
+              </a:rPr>
+              <a:t>Proven by a concurrent-writer stress test: nothing lost, nothing copied.</a:t>
+            </a:r>
+          </a:p>
+        </p:txBody>
+      </p:sp>
+      <p:sp>
+        <p:nvSpPr>
+          <p:cNvPr id="5" name="Rectangle 4"/>
           <p:cNvSpPr/>
           <p:nvPr/>
         </p:nvSpPr>
         <p:spPr>
           <a:xfrm>
-            <a:off x="-45720" y="-45720"/>
-            <a:ext cx="12344400" cy="6949440"/>
+            <a:off x="658368" y="1261872"/>
+            <a:ext cx="3108960" cy="54864"/>
           </a:xfrm>
           <a:prstGeom prst="rect">
             <a:avLst/>
           </a:prstGeom>
           <a:solidFill>
-            <a:srgbClr val="F6F1E8"/>
+            <a:srgbClr val="9A7B1A"/>
           </a:solidFill>
           <a:ln>
             <a:noFill/>
@@ -4318,206 +4326,40 @@
           </a:p>
         </p:txBody>
       </p:sp>
-      <p:sp>
-        <p:nvSpPr>
-          <p:cNvPr id="2" name="Title 1"/>
-          <p:cNvSpPr>
-            <a:spLocks noGrp="1"/>
-          </p:cNvSpPr>
-          <p:nvPr>
-            <p:ph type="title"/>
-          </p:nvPr>
+    </p:spTree>
+  </p:cSld>
+  <p:clrMapOvr>
+    <a:masterClrMapping/>
+  </p:clrMapOvr>
+</p:sld>
+</file>
+
+<file path=ppt/slides/slide6.xml><?xml version="1.0" encoding="utf-8"?>
+<p:sld xmlns:a="http://schemas.openxmlformats.org/drawingml/2006/main" xmlns:p="http://schemas.openxmlformats.org/presentationml/2006/main" xmlns:r="http://schemas.openxmlformats.org/officeDocument/2006/relationships">
+  <p:cSld>
+    <p:spTree>
+      <p:nvGrpSpPr>
+        <p:cNvPr id="1" name=""/>
+        <p:cNvGrpSpPr/>
+        <p:nvPr/>
+      </p:nvGrpSpPr>
+      <p:grpSpPr/>
+      <p:sp>
+        <p:nvSpPr>
+          <p:cNvPr id="4" name="Rectangle 3"/>
+          <p:cNvSpPr/>
+          <p:nvPr/>
         </p:nvSpPr>
         <p:spPr>
           <a:xfrm>
-            <a:off x="868680" y="384048"/>
-            <a:ext cx="10789920" cy="868680"/>
-          </a:xfrm>
-        </p:spPr>
-        <p:txBody>
-          <a:bodyPr wrap="square" anchor="t"/>
-          <a:lstStyle/>
-          <a:p>
-            <a:pPr algn="l"/>
-            <a:r>
-              <a:rPr b="1" sz="2400">
-                <a:solidFill>
-                  <a:srgbClr val="A9791A"/>
-                </a:solidFill>
-                <a:latin typeface="Franklin Gothic Medium"/>
-              </a:rPr>
-              <a:t>The hardest part: a buffer that never sits still</a:t>
-            </a:r>
-          </a:p>
-        </p:txBody>
-      </p:sp>
-      <p:sp>
-        <p:nvSpPr>
-          <p:cNvPr id="3" name="Content Placeholder 2"/>
-          <p:cNvSpPr>
-            <a:spLocks noGrp="1"/>
-          </p:cNvSpPr>
-          <p:nvPr>
-            <p:ph idx="1"/>
-          </p:nvPr>
-        </p:nvSpPr>
-        <p:spPr>
-          <a:xfrm>
-            <a:off x="886968" y="1481328"/>
-            <a:ext cx="10789920" cy="4846320"/>
-          </a:xfrm>
-        </p:spPr>
-        <p:txBody>
-          <a:bodyPr wrap="square">
-            <a:normAutofit/>
-          </a:bodyPr>
-          <a:lstStyle/>
-          <a:p>
-            <a:pPr>
-              <a:spcAft>
-                <a:spcPts val="600"/>
-              </a:spcAft>
-            </a:pPr>
-            <a:r>
-              <a:rPr sz="1500" b="1">
-                <a:solidFill>
-                  <a:srgbClr val="A9791A"/>
-                </a:solidFill>
-                <a:latin typeface="Calibri"/>
-              </a:rPr>
-              <a:t>The problem:</a:t>
-            </a:r>
-          </a:p>
-          <a:p>
-            <a:pPr lvl="1">
-              <a:spcAft>
-                <a:spcPts val="600"/>
-              </a:spcAft>
-            </a:pPr>
-            <a:r>
-              <a:rPr sz="1300" b="0">
-                <a:solidFill>
-                  <a:srgbClr val="232A26"/>
-                </a:solidFill>
-                <a:latin typeface="Calibri"/>
-              </a:rPr>
-              <a:t>Every few seconds the fog node must take everything buffered so far and aggregate it into window summaries, while ten sensors keep writing new readings into that same buffer.</a:t>
-            </a:r>
-          </a:p>
-          <a:p>
-            <a:pPr>
-              <a:spcAft>
-                <a:spcPts val="600"/>
-              </a:spcAft>
-            </a:pPr>
-            <a:r>
-              <a:rPr sz="1500" b="1">
-                <a:solidFill>
-                  <a:srgbClr val="A9791A"/>
-                </a:solidFill>
-                <a:latin typeface="Calibri"/>
-              </a:rPr>
-              <a:t>Why it is hard:</a:t>
-            </a:r>
-          </a:p>
-          <a:p>
-            <a:pPr lvl="1">
-              <a:spcAft>
-                <a:spcPts val="600"/>
-              </a:spcAft>
-            </a:pPr>
-            <a:r>
-              <a:rPr sz="1300" b="0">
-                <a:solidFill>
-                  <a:srgbClr val="232A26"/>
-                </a:solidFill>
-                <a:latin typeface="Calibri"/>
-              </a:rPr>
-              <a:t>One shared buffer and one lock means aggregation blocks ingest. Copying the buffer under the lock stalls every sensor at every window; skipping the lock loses or double-counts readings. A textbook reader-writer race.</a:t>
-            </a:r>
-          </a:p>
-          <a:p>
-            <a:pPr>
-              <a:spcAft>
-                <a:spcPts val="600"/>
-              </a:spcAft>
-            </a:pPr>
-            <a:r>
-              <a:rPr sz="1500" b="1">
-                <a:solidFill>
-                  <a:srgbClr val="A9791A"/>
-                </a:solidFill>
-                <a:latin typeface="Calibri"/>
-              </a:rPr>
-              <a:t>The fix:</a:t>
-            </a:r>
-          </a:p>
-          <a:p>
-            <a:pPr lvl="1">
-              <a:spcAft>
-                <a:spcPts val="600"/>
-              </a:spcAft>
-            </a:pPr>
-            <a:r>
-              <a:rPr sz="1300" b="0">
-                <a:solidFill>
-                  <a:srgbClr val="232A26"/>
-                </a:solidFill>
-                <a:latin typeface="Calibri"/>
-              </a:rPr>
-              <a:t>Double buffering uses two buffers, one live and one flushing. The lock is held only for an instant pointer swap of the two, so aggregation works on the swapped-out data while new readings flow into the fresh buffer.</a:t>
-            </a:r>
-          </a:p>
-          <a:p>
-            <a:pPr>
-              <a:spcAft>
-                <a:spcPts val="600"/>
-              </a:spcAft>
-            </a:pPr>
-            <a:r>
-              <a:rPr sz="1500" b="0">
-                <a:solidFill>
-                  <a:srgbClr val="232A26"/>
-                </a:solidFill>
-                <a:latin typeface="Calibri"/>
-              </a:rPr>
-              <a:t>The flow: sensors write into the active buffer, a pointer swap under lock moves it to the flushing buffer, then the fog node aggregates and publishes.</a:t>
-            </a:r>
-          </a:p>
-          <a:p>
-            <a:pPr>
-              <a:spcAft>
-                <a:spcPts val="600"/>
-              </a:spcAft>
-            </a:pPr>
-            <a:r>
-              <a:rPr sz="1500" b="1">
-                <a:solidFill>
-                  <a:srgbClr val="A9791A"/>
-                </a:solidFill>
-                <a:latin typeface="Calibri"/>
-              </a:rPr>
-              <a:t>Proven by a concurrent-writer stress test: nothing lost, nothing copied.</a:t>
-            </a:r>
-          </a:p>
-        </p:txBody>
-      </p:sp>
-      <p:sp>
-        <p:nvSpPr>
-          <p:cNvPr id="6" name="Rectangle 5"/>
-          <p:cNvSpPr/>
-          <p:nvPr/>
-        </p:nvSpPr>
-        <p:spPr>
-          <a:xfrm>
-            <a:off x="886968" y="1261872"/>
-            <a:ext cx="3108960" cy="36576"/>
+            <a:off x="-45720" y="-45720"/>
+            <a:ext cx="12344400" cy="6949440"/>
           </a:xfrm>
           <a:prstGeom prst="rect">
             <a:avLst/>
           </a:prstGeom>
           <a:solidFill>
-            <a:srgbClr val="A9791A"/>
+            <a:srgbClr val="F4F1E8"/>
           </a:solidFill>
           <a:ln>
             <a:noFill/>
@@ -4546,24 +4388,126 @@
           </a:p>
         </p:txBody>
       </p:sp>
-    </p:spTree>
-  </p:cSld>
-  <p:clrMapOvr>
-    <a:masterClrMapping/>
-  </p:clrMapOvr>
-</p:sld>
-</file>
-
-<file path=ppt/slides/slide6.xml><?xml version="1.0" encoding="utf-8"?>
-<p:sld xmlns:a="http://schemas.openxmlformats.org/drawingml/2006/main" xmlns:p="http://schemas.openxmlformats.org/presentationml/2006/main" xmlns:r="http://schemas.openxmlformats.org/officeDocument/2006/relationships">
-  <p:cSld>
-    <p:spTree>
-      <p:nvGrpSpPr>
-        <p:cNvPr id="1" name=""/>
-        <p:cNvGrpSpPr/>
-        <p:nvPr/>
-      </p:nvGrpSpPr>
-      <p:grpSpPr/>
+      <p:sp>
+        <p:nvSpPr>
+          <p:cNvPr id="2" name="Title 1"/>
+          <p:cNvSpPr>
+            <a:spLocks noGrp="1"/>
+          </p:cNvSpPr>
+          <p:nvPr>
+            <p:ph type="title"/>
+          </p:nvPr>
+        </p:nvSpPr>
+        <p:spPr>
+          <a:xfrm>
+            <a:off x="640080" y="384048"/>
+            <a:ext cx="10972800" cy="868680"/>
+          </a:xfrm>
+        </p:spPr>
+        <p:txBody>
+          <a:bodyPr wrap="square" anchor="t"/>
+          <a:lstStyle/>
+          <a:p>
+            <a:pPr algn="l"/>
+            <a:r>
+              <a:rPr b="1" sz="2700">
+                <a:solidFill>
+                  <a:srgbClr val="9A7B1A"/>
+                </a:solidFill>
+                <a:latin typeface="Constantia"/>
+              </a:rPr>
+              <a:t>Takeaways</a:t>
+            </a:r>
+          </a:p>
+        </p:txBody>
+      </p:sp>
+      <p:sp>
+        <p:nvSpPr>
+          <p:cNvPr id="3" name="Content Placeholder 2"/>
+          <p:cNvSpPr>
+            <a:spLocks noGrp="1"/>
+          </p:cNvSpPr>
+          <p:nvPr>
+            <p:ph idx="1"/>
+          </p:nvPr>
+        </p:nvSpPr>
+        <p:spPr>
+          <a:xfrm>
+            <a:off x="658368" y="1481328"/>
+            <a:ext cx="10972800" cy="4846320"/>
+          </a:xfrm>
+        </p:spPr>
+        <p:txBody>
+          <a:bodyPr wrap="square">
+            <a:normAutofit/>
+          </a:bodyPr>
+          <a:lstStyle/>
+          <a:p>
+            <a:pPr>
+              <a:spcAft>
+                <a:spcPts val="900"/>
+              </a:spcAft>
+            </a:pPr>
+            <a:r>
+              <a:rPr sz="1700" b="0">
+                <a:solidFill>
+                  <a:srgbClr val="232A26"/>
+                </a:solidFill>
+                <a:latin typeface="Georgia"/>
+              </a:rPr>
+              <a:t>Push work to the edge: windowing and alerting at the fog node turn a constant stream of raw readings into one compact summary per window before anything leaves the site.</a:t>
+            </a:r>
+          </a:p>
+          <a:p>
+            <a:pPr>
+              <a:spcAft>
+                <a:spcPts val="900"/>
+              </a:spcAft>
+            </a:pPr>
+            <a:r>
+              <a:rPr sz="1700" b="0">
+                <a:solidFill>
+                  <a:srgbClr val="232A26"/>
+                </a:solidFill>
+                <a:latin typeface="Georgia"/>
+              </a:rPr>
+              <a:t>Keep the cloud serverless: Amazon SQS, AWS Lambda and DynamoDB absorbed a 2,000-message burst in the load test with nothing to provision or manage.</a:t>
+            </a:r>
+          </a:p>
+          <a:p>
+            <a:pPr>
+              <a:spcAft>
+                <a:spcPts val="900"/>
+              </a:spcAft>
+            </a:pPr>
+            <a:r>
+              <a:rPr sz="1700" b="0">
+                <a:solidFill>
+                  <a:srgbClr val="232A26"/>
+                </a:solidFill>
+                <a:latin typeface="Georgia"/>
+              </a:rPr>
+              <a:t>Prove it, then ship it: 110 automated tests plus a scripted end-to-end pipeline check, and a single scripted step to deploy the same stack to AWS.</a:t>
+            </a:r>
+          </a:p>
+          <a:p>
+            <a:pPr>
+              <a:spcAft>
+                <a:spcPts val="900"/>
+              </a:spcAft>
+            </a:pPr>
+            <a:r>
+              <a:rPr sz="1700" b="0">
+                <a:solidFill>
+                  <a:srgbClr val="232A26"/>
+                </a:solidFill>
+                <a:latin typeface="Georgia"/>
+              </a:rPr>
+              <a:t>Thank you. Questions?</a:t>
+            </a:r>
+          </a:p>
+        </p:txBody>
+      </p:sp>
       <p:sp>
         <p:nvSpPr>
           <p:cNvPr id="5" name="Rectangle 4"/>
@@ -4572,222 +4516,14 @@
         </p:nvSpPr>
         <p:spPr>
           <a:xfrm>
-            <a:off x="0" y="0"/>
-            <a:ext cx="502920" cy="6858000"/>
+            <a:off x="658368" y="1261872"/>
+            <a:ext cx="3108960" cy="54864"/>
           </a:xfrm>
           <a:prstGeom prst="rect">
             <a:avLst/>
           </a:prstGeom>
           <a:solidFill>
-            <a:srgbClr val="A9791A"/>
-          </a:solidFill>
-          <a:ln>
-            <a:noFill/>
-          </a:ln>
-          <a:effectLst/>
-        </p:spPr>
-        <p:style>
-          <a:lnRef idx="1">
-            <a:schemeClr val="accent1"/>
-          </a:lnRef>
-          <a:fillRef idx="3">
-            <a:schemeClr val="accent1"/>
-          </a:fillRef>
-          <a:effectRef idx="2">
-            <a:schemeClr val="accent1"/>
-          </a:effectRef>
-          <a:fontRef idx="minor">
-            <a:schemeClr val="lt1"/>
-          </a:fontRef>
-        </p:style>
-        <p:txBody>
-          <a:bodyPr rtlCol="0" anchor="ctr"/>
-          <a:lstStyle/>
-          <a:p>
-            <a:pPr algn="ctr"/>
-          </a:p>
-        </p:txBody>
-      </p:sp>
-      <p:sp>
-        <p:nvSpPr>
-          <p:cNvPr id="4" name="Rectangle 3"/>
-          <p:cNvSpPr/>
-          <p:nvPr/>
-        </p:nvSpPr>
-        <p:spPr>
-          <a:xfrm>
-            <a:off x="-45720" y="-45720"/>
-            <a:ext cx="12344400" cy="6949440"/>
-          </a:xfrm>
-          <a:prstGeom prst="rect">
-            <a:avLst/>
-          </a:prstGeom>
-          <a:solidFill>
-            <a:srgbClr val="F6F1E8"/>
-          </a:solidFill>
-          <a:ln>
-            <a:noFill/>
-          </a:ln>
-          <a:effectLst/>
-        </p:spPr>
-        <p:style>
-          <a:lnRef idx="1">
-            <a:schemeClr val="accent1"/>
-          </a:lnRef>
-          <a:fillRef idx="3">
-            <a:schemeClr val="accent1"/>
-          </a:fillRef>
-          <a:effectRef idx="2">
-            <a:schemeClr val="accent1"/>
-          </a:effectRef>
-          <a:fontRef idx="minor">
-            <a:schemeClr val="lt1"/>
-          </a:fontRef>
-        </p:style>
-        <p:txBody>
-          <a:bodyPr rtlCol="0" anchor="ctr"/>
-          <a:lstStyle/>
-          <a:p>
-            <a:pPr algn="ctr"/>
-          </a:p>
-        </p:txBody>
-      </p:sp>
-      <p:sp>
-        <p:nvSpPr>
-          <p:cNvPr id="2" name="Title 1"/>
-          <p:cNvSpPr>
-            <a:spLocks noGrp="1"/>
-          </p:cNvSpPr>
-          <p:nvPr>
-            <p:ph type="title"/>
-          </p:nvPr>
-        </p:nvSpPr>
-        <p:spPr>
-          <a:xfrm>
-            <a:off x="868680" y="384048"/>
-            <a:ext cx="10789920" cy="868680"/>
-          </a:xfrm>
-        </p:spPr>
-        <p:txBody>
-          <a:bodyPr wrap="square" anchor="t"/>
-          <a:lstStyle/>
-          <a:p>
-            <a:pPr algn="l"/>
-            <a:r>
-              <a:rPr b="1" sz="2700">
-                <a:solidFill>
-                  <a:srgbClr val="A9791A"/>
-                </a:solidFill>
-                <a:latin typeface="Franklin Gothic Medium"/>
-              </a:rPr>
-              <a:t>Takeaways</a:t>
-            </a:r>
-          </a:p>
-        </p:txBody>
-      </p:sp>
-      <p:sp>
-        <p:nvSpPr>
-          <p:cNvPr id="3" name="Content Placeholder 2"/>
-          <p:cNvSpPr>
-            <a:spLocks noGrp="1"/>
-          </p:cNvSpPr>
-          <p:nvPr>
-            <p:ph idx="1"/>
-          </p:nvPr>
-        </p:nvSpPr>
-        <p:spPr>
-          <a:xfrm>
-            <a:off x="886968" y="1481328"/>
-            <a:ext cx="10789920" cy="4846320"/>
-          </a:xfrm>
-        </p:spPr>
-        <p:txBody>
-          <a:bodyPr wrap="square">
-            <a:normAutofit/>
-          </a:bodyPr>
-          <a:lstStyle/>
-          <a:p>
-            <a:pPr>
-              <a:spcAft>
-                <a:spcPts val="900"/>
-              </a:spcAft>
-            </a:pPr>
-            <a:r>
-              <a:rPr sz="1700" b="0">
-                <a:solidFill>
-                  <a:srgbClr val="232A26"/>
-                </a:solidFill>
-                <a:latin typeface="Calibri"/>
-              </a:rPr>
-              <a:t>Push work to the edge: windowing and alerting at the fog node turn a constant stream of raw readings into one compact summary per window before anything leaves the site.</a:t>
-            </a:r>
-          </a:p>
-          <a:p>
-            <a:pPr>
-              <a:spcAft>
-                <a:spcPts val="900"/>
-              </a:spcAft>
-            </a:pPr>
-            <a:r>
-              <a:rPr sz="1700" b="0">
-                <a:solidFill>
-                  <a:srgbClr val="232A26"/>
-                </a:solidFill>
-                <a:latin typeface="Calibri"/>
-              </a:rPr>
-              <a:t>Keep the cloud serverless: Amazon SQS, AWS Lambda and DynamoDB absorbed a 2,000-message burst in the load test with nothing to provision or manage.</a:t>
-            </a:r>
-          </a:p>
-          <a:p>
-            <a:pPr>
-              <a:spcAft>
-                <a:spcPts val="900"/>
-              </a:spcAft>
-            </a:pPr>
-            <a:r>
-              <a:rPr sz="1700" b="0">
-                <a:solidFill>
-                  <a:srgbClr val="232A26"/>
-                </a:solidFill>
-                <a:latin typeface="Calibri"/>
-              </a:rPr>
-              <a:t>Prove it, then ship it: 110 automated tests plus a scripted end-to-end pipeline check, and a single scripted step to deploy the same stack to AWS.</a:t>
-            </a:r>
-          </a:p>
-          <a:p>
-            <a:pPr>
-              <a:spcAft>
-                <a:spcPts val="900"/>
-              </a:spcAft>
-            </a:pPr>
-            <a:r>
-              <a:rPr sz="1700" b="0">
-                <a:solidFill>
-                  <a:srgbClr val="232A26"/>
-                </a:solidFill>
-                <a:latin typeface="Calibri"/>
-              </a:rPr>
-              <a:t>Thank you. Questions?</a:t>
-            </a:r>
-          </a:p>
-        </p:txBody>
-      </p:sp>
-      <p:sp>
-        <p:nvSpPr>
-          <p:cNvPr id="6" name="Rectangle 5"/>
-          <p:cNvSpPr/>
-          <p:nvPr/>
-        </p:nvSpPr>
-        <p:spPr>
-          <a:xfrm>
-            <a:off x="886968" y="1261872"/>
-            <a:ext cx="3108960" cy="36576"/>
-          </a:xfrm>
-          <a:prstGeom prst="rect">
-            <a:avLst/>
-          </a:prstGeom>
-          <a:solidFill>
-            <a:srgbClr val="A9791A"/>
+            <a:srgbClr val="9A7B1A"/>
           </a:solidFill>
           <a:ln>
             <a:noFill/>
